--- a/media/inital-presentation.pptx
+++ b/media/inital-presentation.pptx
@@ -5,19 +5,21 @@
     <p:sldMasterId id="2147483648" r:id="rId1"/>
   </p:sldMasterIdLst>
   <p:notesMasterIdLst>
-    <p:notesMasterId r:id="rId12"/>
+    <p:notesMasterId r:id="rId14"/>
   </p:notesMasterIdLst>
   <p:sldIdLst>
     <p:sldId id="256" r:id="rId2"/>
     <p:sldId id="261" r:id="rId3"/>
     <p:sldId id="258" r:id="rId4"/>
     <p:sldId id="266" r:id="rId5"/>
-    <p:sldId id="268" r:id="rId6"/>
-    <p:sldId id="263" r:id="rId7"/>
-    <p:sldId id="259" r:id="rId8"/>
-    <p:sldId id="265" r:id="rId9"/>
-    <p:sldId id="267" r:id="rId10"/>
-    <p:sldId id="272" r:id="rId11"/>
+    <p:sldId id="273" r:id="rId6"/>
+    <p:sldId id="268" r:id="rId7"/>
+    <p:sldId id="263" r:id="rId8"/>
+    <p:sldId id="259" r:id="rId9"/>
+    <p:sldId id="265" r:id="rId10"/>
+    <p:sldId id="267" r:id="rId11"/>
+    <p:sldId id="274" r:id="rId12"/>
+    <p:sldId id="272" r:id="rId13"/>
   </p:sldIdLst>
   <p:sldSz cx="12192000" cy="6858000"/>
   <p:notesSz cx="6858000" cy="9144000"/>
@@ -206,7 +208,7 @@
           <a:p>
             <a:fld id="{61C1A15F-A13D-9843-8192-FD0BCB0CB994}" type="datetimeFigureOut">
               <a:rPr lang="en-US" smtClean="0"/>
-              <a:t>12/2/25</a:t>
+              <a:t>12/5/25</a:t>
             </a:fld>
             <a:endParaRPr lang="en-US"/>
           </a:p>
@@ -620,7 +622,7 @@
           <a:p>
             <a:fld id="{1364F926-D2E2-274D-8CAD-1FE4A544B8F5}" type="datetimeFigureOut">
               <a:rPr lang="en-US" smtClean="0"/>
-              <a:t>12/2/25</a:t>
+              <a:t>12/5/25</a:t>
             </a:fld>
             <a:endParaRPr lang="en-US"/>
           </a:p>
@@ -818,7 +820,7 @@
           <a:p>
             <a:fld id="{1364F926-D2E2-274D-8CAD-1FE4A544B8F5}" type="datetimeFigureOut">
               <a:rPr lang="en-US" smtClean="0"/>
-              <a:t>12/2/25</a:t>
+              <a:t>12/5/25</a:t>
             </a:fld>
             <a:endParaRPr lang="en-US"/>
           </a:p>
@@ -1026,7 +1028,7 @@
           <a:p>
             <a:fld id="{1364F926-D2E2-274D-8CAD-1FE4A544B8F5}" type="datetimeFigureOut">
               <a:rPr lang="en-US" smtClean="0"/>
-              <a:t>12/2/25</a:t>
+              <a:t>12/5/25</a:t>
             </a:fld>
             <a:endParaRPr lang="en-US"/>
           </a:p>
@@ -1224,7 +1226,7 @@
           <a:p>
             <a:fld id="{1364F926-D2E2-274D-8CAD-1FE4A544B8F5}" type="datetimeFigureOut">
               <a:rPr lang="en-US" smtClean="0"/>
-              <a:t>12/2/25</a:t>
+              <a:t>12/5/25</a:t>
             </a:fld>
             <a:endParaRPr lang="en-US"/>
           </a:p>
@@ -1499,7 +1501,7 @@
           <a:p>
             <a:fld id="{1364F926-D2E2-274D-8CAD-1FE4A544B8F5}" type="datetimeFigureOut">
               <a:rPr lang="en-US" smtClean="0"/>
-              <a:t>12/2/25</a:t>
+              <a:t>12/5/25</a:t>
             </a:fld>
             <a:endParaRPr lang="en-US"/>
           </a:p>
@@ -1764,7 +1766,7 @@
           <a:p>
             <a:fld id="{1364F926-D2E2-274D-8CAD-1FE4A544B8F5}" type="datetimeFigureOut">
               <a:rPr lang="en-US" smtClean="0"/>
-              <a:t>12/2/25</a:t>
+              <a:t>12/5/25</a:t>
             </a:fld>
             <a:endParaRPr lang="en-US"/>
           </a:p>
@@ -2176,7 +2178,7 @@
           <a:p>
             <a:fld id="{1364F926-D2E2-274D-8CAD-1FE4A544B8F5}" type="datetimeFigureOut">
               <a:rPr lang="en-US" smtClean="0"/>
-              <a:t>12/2/25</a:t>
+              <a:t>12/5/25</a:t>
             </a:fld>
             <a:endParaRPr lang="en-US"/>
           </a:p>
@@ -2317,7 +2319,7 @@
           <a:p>
             <a:fld id="{1364F926-D2E2-274D-8CAD-1FE4A544B8F5}" type="datetimeFigureOut">
               <a:rPr lang="en-US" smtClean="0"/>
-              <a:t>12/2/25</a:t>
+              <a:t>12/5/25</a:t>
             </a:fld>
             <a:endParaRPr lang="en-US"/>
           </a:p>
@@ -2430,7 +2432,7 @@
           <a:p>
             <a:fld id="{1364F926-D2E2-274D-8CAD-1FE4A544B8F5}" type="datetimeFigureOut">
               <a:rPr lang="en-US" smtClean="0"/>
-              <a:t>12/2/25</a:t>
+              <a:t>12/5/25</a:t>
             </a:fld>
             <a:endParaRPr lang="en-US"/>
           </a:p>
@@ -2741,7 +2743,7 @@
           <a:p>
             <a:fld id="{1364F926-D2E2-274D-8CAD-1FE4A544B8F5}" type="datetimeFigureOut">
               <a:rPr lang="en-US" smtClean="0"/>
-              <a:t>12/2/25</a:t>
+              <a:t>12/5/25</a:t>
             </a:fld>
             <a:endParaRPr lang="en-US"/>
           </a:p>
@@ -3029,7 +3031,7 @@
           <a:p>
             <a:fld id="{1364F926-D2E2-274D-8CAD-1FE4A544B8F5}" type="datetimeFigureOut">
               <a:rPr lang="en-US" smtClean="0"/>
-              <a:t>12/2/25</a:t>
+              <a:t>12/5/25</a:t>
             </a:fld>
             <a:endParaRPr lang="en-US"/>
           </a:p>
@@ -3270,7 +3272,7 @@
           <a:p>
             <a:fld id="{1364F926-D2E2-274D-8CAD-1FE4A544B8F5}" type="datetimeFigureOut">
               <a:rPr lang="en-US" smtClean="0"/>
-              <a:t>12/2/25</a:t>
+              <a:t>12/5/25</a:t>
             </a:fld>
             <a:endParaRPr lang="en-US"/>
           </a:p>
@@ -3753,1712 +3755,6 @@
         <p:cNvPr id="1" name="">
           <a:extLst>
             <a:ext uri="{FF2B5EF4-FFF2-40B4-BE49-F238E27FC236}">
-              <a16:creationId xmlns:a16="http://schemas.microsoft.com/office/drawing/2014/main" id="{87D2A850-1678-0E25-3326-AEA46F9B7429}"/>
-            </a:ext>
-          </a:extLst>
-        </p:cNvPr>
-        <p:cNvGrpSpPr/>
-        <p:nvPr/>
-      </p:nvGrpSpPr>
-      <p:grpSpPr>
-        <a:xfrm>
-          <a:off x="0" y="0"/>
-          <a:ext cx="0" cy="0"/>
-          <a:chOff x="0" y="0"/>
-          <a:chExt cx="0" cy="0"/>
-        </a:xfrm>
-      </p:grpSpPr>
-      <p:sp>
-        <p:nvSpPr>
-          <p:cNvPr id="2" name="Title 1">
-            <a:extLst>
-              <a:ext uri="{FF2B5EF4-FFF2-40B4-BE49-F238E27FC236}">
-                <a16:creationId xmlns:a16="http://schemas.microsoft.com/office/drawing/2014/main" id="{F636F979-E11A-255D-B619-8065D477C088}"/>
-              </a:ext>
-            </a:extLst>
-          </p:cNvPr>
-          <p:cNvSpPr>
-            <a:spLocks noGrp="1"/>
-          </p:cNvSpPr>
-          <p:nvPr>
-            <p:ph type="title"/>
-          </p:nvPr>
-        </p:nvSpPr>
-        <p:spPr/>
-        <p:txBody>
-          <a:bodyPr/>
-          <a:lstStyle/>
-          <a:p>
-            <a:r>
-              <a:rPr lang="en-US" dirty="0"/>
-              <a:t>Strategies to Compare</a:t>
-            </a:r>
-          </a:p>
-        </p:txBody>
-      </p:sp>
-      <p:sp>
-        <p:nvSpPr>
-          <p:cNvPr id="4" name="Content Placeholder 3">
-            <a:extLst>
-              <a:ext uri="{FF2B5EF4-FFF2-40B4-BE49-F238E27FC236}">
-                <a16:creationId xmlns:a16="http://schemas.microsoft.com/office/drawing/2014/main" id="{944CC9D5-B88E-EB37-6674-BCD2264F25C9}"/>
-              </a:ext>
-            </a:extLst>
-          </p:cNvPr>
-          <p:cNvSpPr>
-            <a:spLocks noGrp="1"/>
-          </p:cNvSpPr>
-          <p:nvPr>
-            <p:ph idx="1"/>
-          </p:nvPr>
-        </p:nvSpPr>
-        <p:spPr/>
-        <p:txBody>
-          <a:bodyPr/>
-          <a:lstStyle/>
-          <a:p>
-            <a:r>
-              <a:rPr lang="en-US" dirty="0"/>
-              <a:t>[Status quo]</a:t>
-            </a:r>
-          </a:p>
-          <a:p>
-            <a:r>
-              <a:rPr lang="en-US" dirty="0"/>
-              <a:t>[Strategies]</a:t>
-            </a:r>
-          </a:p>
-          <a:p>
-            <a:r>
-              <a:rPr lang="en-US" dirty="0"/>
-              <a:t>[1-2 sentences on how they vary]</a:t>
-            </a:r>
-          </a:p>
-          <a:p>
-            <a:pPr marL="0" indent="0">
-              <a:buNone/>
-            </a:pPr>
-            <a:endParaRPr lang="en-US" dirty="0"/>
-          </a:p>
-        </p:txBody>
-      </p:sp>
-    </p:spTree>
-    <p:extLst>
-      <p:ext uri="{BB962C8B-B14F-4D97-AF65-F5344CB8AC3E}">
-        <p14:creationId xmlns:p14="http://schemas.microsoft.com/office/powerpoint/2010/main" val="3636997760"/>
-      </p:ext>
-    </p:extLst>
-  </p:cSld>
-  <p:clrMapOvr>
-    <a:masterClrMapping/>
-  </p:clrMapOvr>
-</p:sld>
-</file>
-
-<file path=ppt/slides/slide2.xml><?xml version="1.0" encoding="utf-8"?>
-<p:sld xmlns:a="http://schemas.openxmlformats.org/drawingml/2006/main" xmlns:r="http://schemas.openxmlformats.org/officeDocument/2006/relationships" xmlns:p="http://schemas.openxmlformats.org/presentationml/2006/main">
-  <p:cSld>
-    <p:spTree>
-      <p:nvGrpSpPr>
-        <p:cNvPr id="1" name="">
-          <a:extLst>
-            <a:ext uri="{FF2B5EF4-FFF2-40B4-BE49-F238E27FC236}">
-              <a16:creationId xmlns:a16="http://schemas.microsoft.com/office/drawing/2014/main" id="{DEC94B34-3F81-8585-790E-1D26F6E2AD13}"/>
-            </a:ext>
-          </a:extLst>
-        </p:cNvPr>
-        <p:cNvGrpSpPr/>
-        <p:nvPr/>
-      </p:nvGrpSpPr>
-      <p:grpSpPr>
-        <a:xfrm>
-          <a:off x="0" y="0"/>
-          <a:ext cx="0" cy="0"/>
-          <a:chOff x="0" y="0"/>
-          <a:chExt cx="0" cy="0"/>
-        </a:xfrm>
-      </p:grpSpPr>
-      <p:sp>
-        <p:nvSpPr>
-          <p:cNvPr id="2" name="Title 1">
-            <a:extLst>
-              <a:ext uri="{FF2B5EF4-FFF2-40B4-BE49-F238E27FC236}">
-                <a16:creationId xmlns:a16="http://schemas.microsoft.com/office/drawing/2014/main" id="{42E49701-D48E-435F-93FE-B46BC6CC02C3}"/>
-              </a:ext>
-            </a:extLst>
-          </p:cNvPr>
-          <p:cNvSpPr>
-            <a:spLocks noGrp="1"/>
-          </p:cNvSpPr>
-          <p:nvPr>
-            <p:ph type="ctrTitle"/>
-          </p:nvPr>
-        </p:nvSpPr>
-        <p:spPr/>
-        <p:txBody>
-          <a:bodyPr>
-            <a:normAutofit/>
-          </a:bodyPr>
-          <a:lstStyle/>
-          <a:p>
-            <a:r>
-              <a:rPr lang="en-US" dirty="0"/>
-              <a:t>Cost Effectiveness of Drug Prescribing for Medication  X</a:t>
-            </a:r>
-          </a:p>
-        </p:txBody>
-      </p:sp>
-      <p:sp>
-        <p:nvSpPr>
-          <p:cNvPr id="3" name="Subtitle 2">
-            <a:extLst>
-              <a:ext uri="{FF2B5EF4-FFF2-40B4-BE49-F238E27FC236}">
-                <a16:creationId xmlns:a16="http://schemas.microsoft.com/office/drawing/2014/main" id="{F1A27389-90EF-7DA0-6BFA-732FC3E0FA74}"/>
-              </a:ext>
-            </a:extLst>
-          </p:cNvPr>
-          <p:cNvSpPr>
-            <a:spLocks noGrp="1"/>
-          </p:cNvSpPr>
-          <p:nvPr>
-            <p:ph type="subTitle" idx="1"/>
-          </p:nvPr>
-        </p:nvSpPr>
-        <p:spPr/>
-        <p:txBody>
-          <a:bodyPr/>
-          <a:lstStyle/>
-          <a:p>
-            <a:r>
-              <a:rPr lang="en-US" dirty="0"/>
-              <a:t>Project as of  April 1, 2025</a:t>
-            </a:r>
-          </a:p>
-        </p:txBody>
-      </p:sp>
-      <p:sp>
-        <p:nvSpPr>
-          <p:cNvPr id="4" name="Subtitle 2">
-            <a:extLst>
-              <a:ext uri="{FF2B5EF4-FFF2-40B4-BE49-F238E27FC236}">
-                <a16:creationId xmlns:a16="http://schemas.microsoft.com/office/drawing/2014/main" id="{D18D822D-81A7-B9E0-BD20-EE219FA1A1FD}"/>
-              </a:ext>
-            </a:extLst>
-          </p:cNvPr>
-          <p:cNvSpPr txBox="1">
-            <a:spLocks/>
-          </p:cNvSpPr>
-          <p:nvPr/>
-        </p:nvSpPr>
-        <p:spPr>
-          <a:xfrm>
-            <a:off x="2832847" y="6407991"/>
-            <a:ext cx="9144000" cy="450009"/>
-          </a:xfrm>
-          <a:prstGeom prst="rect">
-            <a:avLst/>
-          </a:prstGeom>
-        </p:spPr>
-        <p:txBody>
-          <a:bodyPr vert="horz" lIns="91440" tIns="45720" rIns="91440" bIns="45720" rtlCol="0">
-            <a:normAutofit fontScale="92500"/>
-          </a:bodyPr>
-          <a:lstStyle>
-            <a:lvl1pPr marL="0" indent="0" algn="ctr" defTabSz="914400" rtl="0" eaLnBrk="1" latinLnBrk="0" hangingPunct="1">
-              <a:lnSpc>
-                <a:spcPct val="90000"/>
-              </a:lnSpc>
-              <a:spcBef>
-                <a:spcPts val="1000"/>
-              </a:spcBef>
-              <a:buFont typeface="Arial" panose="020B0604020202020204" pitchFamily="34" charset="0"/>
-              <a:buNone/>
-              <a:defRPr sz="2400" kern="1200">
-                <a:solidFill>
-                  <a:schemeClr val="tx1"/>
-                </a:solidFill>
-                <a:latin typeface="+mn-lt"/>
-                <a:ea typeface="+mn-ea"/>
-                <a:cs typeface="+mn-cs"/>
-              </a:defRPr>
-            </a:lvl1pPr>
-            <a:lvl2pPr marL="457200" indent="0" algn="ctr" defTabSz="914400" rtl="0" eaLnBrk="1" latinLnBrk="0" hangingPunct="1">
-              <a:lnSpc>
-                <a:spcPct val="90000"/>
-              </a:lnSpc>
-              <a:spcBef>
-                <a:spcPts val="500"/>
-              </a:spcBef>
-              <a:buFont typeface="Arial" panose="020B0604020202020204" pitchFamily="34" charset="0"/>
-              <a:buNone/>
-              <a:defRPr sz="2000" kern="1200">
-                <a:solidFill>
-                  <a:schemeClr val="tx1"/>
-                </a:solidFill>
-                <a:latin typeface="+mn-lt"/>
-                <a:ea typeface="+mn-ea"/>
-                <a:cs typeface="+mn-cs"/>
-              </a:defRPr>
-            </a:lvl2pPr>
-            <a:lvl3pPr marL="914400" indent="0" algn="ctr" defTabSz="914400" rtl="0" eaLnBrk="1" latinLnBrk="0" hangingPunct="1">
-              <a:lnSpc>
-                <a:spcPct val="90000"/>
-              </a:lnSpc>
-              <a:spcBef>
-                <a:spcPts val="500"/>
-              </a:spcBef>
-              <a:buFont typeface="Arial" panose="020B0604020202020204" pitchFamily="34" charset="0"/>
-              <a:buNone/>
-              <a:defRPr sz="1800" kern="1200">
-                <a:solidFill>
-                  <a:schemeClr val="tx1"/>
-                </a:solidFill>
-                <a:latin typeface="+mn-lt"/>
-                <a:ea typeface="+mn-ea"/>
-                <a:cs typeface="+mn-cs"/>
-              </a:defRPr>
-            </a:lvl3pPr>
-            <a:lvl4pPr marL="1371600" indent="0" algn="ctr" defTabSz="914400" rtl="0" eaLnBrk="1" latinLnBrk="0" hangingPunct="1">
-              <a:lnSpc>
-                <a:spcPct val="90000"/>
-              </a:lnSpc>
-              <a:spcBef>
-                <a:spcPts val="500"/>
-              </a:spcBef>
-              <a:buFont typeface="Arial" panose="020B0604020202020204" pitchFamily="34" charset="0"/>
-              <a:buNone/>
-              <a:defRPr sz="1600" kern="1200">
-                <a:solidFill>
-                  <a:schemeClr val="tx1"/>
-                </a:solidFill>
-                <a:latin typeface="+mn-lt"/>
-                <a:ea typeface="+mn-ea"/>
-                <a:cs typeface="+mn-cs"/>
-              </a:defRPr>
-            </a:lvl4pPr>
-            <a:lvl5pPr marL="1828800" indent="0" algn="ctr" defTabSz="914400" rtl="0" eaLnBrk="1" latinLnBrk="0" hangingPunct="1">
-              <a:lnSpc>
-                <a:spcPct val="90000"/>
-              </a:lnSpc>
-              <a:spcBef>
-                <a:spcPts val="500"/>
-              </a:spcBef>
-              <a:buFont typeface="Arial" panose="020B0604020202020204" pitchFamily="34" charset="0"/>
-              <a:buNone/>
-              <a:defRPr sz="1600" kern="1200">
-                <a:solidFill>
-                  <a:schemeClr val="tx1"/>
-                </a:solidFill>
-                <a:latin typeface="+mn-lt"/>
-                <a:ea typeface="+mn-ea"/>
-                <a:cs typeface="+mn-cs"/>
-              </a:defRPr>
-            </a:lvl5pPr>
-            <a:lvl6pPr marL="2286000" indent="0" algn="ctr" defTabSz="914400" rtl="0" eaLnBrk="1" latinLnBrk="0" hangingPunct="1">
-              <a:lnSpc>
-                <a:spcPct val="90000"/>
-              </a:lnSpc>
-              <a:spcBef>
-                <a:spcPts val="500"/>
-              </a:spcBef>
-              <a:buFont typeface="Arial" panose="020B0604020202020204" pitchFamily="34" charset="0"/>
-              <a:buNone/>
-              <a:defRPr sz="1600" kern="1200">
-                <a:solidFill>
-                  <a:schemeClr val="tx1"/>
-                </a:solidFill>
-                <a:latin typeface="+mn-lt"/>
-                <a:ea typeface="+mn-ea"/>
-                <a:cs typeface="+mn-cs"/>
-              </a:defRPr>
-            </a:lvl6pPr>
-            <a:lvl7pPr marL="2743200" indent="0" algn="ctr" defTabSz="914400" rtl="0" eaLnBrk="1" latinLnBrk="0" hangingPunct="1">
-              <a:lnSpc>
-                <a:spcPct val="90000"/>
-              </a:lnSpc>
-              <a:spcBef>
-                <a:spcPts val="500"/>
-              </a:spcBef>
-              <a:buFont typeface="Arial" panose="020B0604020202020204" pitchFamily="34" charset="0"/>
-              <a:buNone/>
-              <a:defRPr sz="1600" kern="1200">
-                <a:solidFill>
-                  <a:schemeClr val="tx1"/>
-                </a:solidFill>
-                <a:latin typeface="+mn-lt"/>
-                <a:ea typeface="+mn-ea"/>
-                <a:cs typeface="+mn-cs"/>
-              </a:defRPr>
-            </a:lvl7pPr>
-            <a:lvl8pPr marL="3200400" indent="0" algn="ctr" defTabSz="914400" rtl="0" eaLnBrk="1" latinLnBrk="0" hangingPunct="1">
-              <a:lnSpc>
-                <a:spcPct val="90000"/>
-              </a:lnSpc>
-              <a:spcBef>
-                <a:spcPts val="500"/>
-              </a:spcBef>
-              <a:buFont typeface="Arial" panose="020B0604020202020204" pitchFamily="34" charset="0"/>
-              <a:buNone/>
-              <a:defRPr sz="1600" kern="1200">
-                <a:solidFill>
-                  <a:schemeClr val="tx1"/>
-                </a:solidFill>
-                <a:latin typeface="+mn-lt"/>
-                <a:ea typeface="+mn-ea"/>
-                <a:cs typeface="+mn-cs"/>
-              </a:defRPr>
-            </a:lvl8pPr>
-            <a:lvl9pPr marL="3657600" indent="0" algn="ctr" defTabSz="914400" rtl="0" eaLnBrk="1" latinLnBrk="0" hangingPunct="1">
-              <a:lnSpc>
-                <a:spcPct val="90000"/>
-              </a:lnSpc>
-              <a:spcBef>
-                <a:spcPts val="500"/>
-              </a:spcBef>
-              <a:buFont typeface="Arial" panose="020B0604020202020204" pitchFamily="34" charset="0"/>
-              <a:buNone/>
-              <a:defRPr sz="1600" kern="1200">
-                <a:solidFill>
-                  <a:schemeClr val="tx1"/>
-                </a:solidFill>
-                <a:latin typeface="+mn-lt"/>
-                <a:ea typeface="+mn-ea"/>
-                <a:cs typeface="+mn-cs"/>
-              </a:defRPr>
-            </a:lvl9pPr>
-          </a:lstStyle>
-          <a:p>
-            <a:r>
-              <a:rPr lang="en-US" i="1" dirty="0"/>
-              <a:t>This is a sample, please excuse any inaccurate information or mistakes.</a:t>
-            </a:r>
-          </a:p>
-        </p:txBody>
-      </p:sp>
-    </p:spTree>
-    <p:extLst>
-      <p:ext uri="{BB962C8B-B14F-4D97-AF65-F5344CB8AC3E}">
-        <p14:creationId xmlns:p14="http://schemas.microsoft.com/office/powerpoint/2010/main" val="2308231345"/>
-      </p:ext>
-    </p:extLst>
-  </p:cSld>
-  <p:clrMapOvr>
-    <a:masterClrMapping/>
-  </p:clrMapOvr>
-</p:sld>
-</file>
-
-<file path=ppt/slides/slide3.xml><?xml version="1.0" encoding="utf-8"?>
-<p:sld xmlns:a="http://schemas.openxmlformats.org/drawingml/2006/main" xmlns:r="http://schemas.openxmlformats.org/officeDocument/2006/relationships" xmlns:p="http://schemas.openxmlformats.org/presentationml/2006/main">
-  <p:cSld>
-    <p:bg>
-      <p:bgPr>
-        <a:solidFill>
-          <a:schemeClr val="bg1"/>
-        </a:solidFill>
-        <a:effectLst/>
-      </p:bgPr>
-    </p:bg>
-    <p:spTree>
-      <p:nvGrpSpPr>
-        <p:cNvPr id="1" name=""/>
-        <p:cNvGrpSpPr/>
-        <p:nvPr/>
-      </p:nvGrpSpPr>
-      <p:grpSpPr>
-        <a:xfrm>
-          <a:off x="0" y="0"/>
-          <a:ext cx="0" cy="0"/>
-          <a:chOff x="0" y="0"/>
-          <a:chExt cx="0" cy="0"/>
-        </a:xfrm>
-      </p:grpSpPr>
-      <p:sp useBgFill="1">
-        <p:nvSpPr>
-          <p:cNvPr id="1045" name="Rectangle 1044">
-            <a:extLst>
-              <a:ext uri="{FF2B5EF4-FFF2-40B4-BE49-F238E27FC236}">
-                <a16:creationId xmlns:a16="http://schemas.microsoft.com/office/drawing/2014/main" id="{E817EB35-4D5C-493B-8459-98C99FD1667F}"/>
-              </a:ext>
-              <a:ext uri="{C183D7F6-B498-43B3-948B-1728B52AA6E4}">
-                <adec:decorative xmlns:adec="http://schemas.microsoft.com/office/drawing/2017/decorative" val="1"/>
-              </a:ext>
-            </a:extLst>
-          </p:cNvPr>
-          <p:cNvSpPr>
-            <a:spLocks noGrp="1" noRot="1" noChangeAspect="1" noMove="1" noResize="1" noEditPoints="1" noAdjustHandles="1" noChangeArrowheads="1" noChangeShapeType="1" noTextEdit="1"/>
-          </p:cNvSpPr>
-          <p:nvPr>
-            <p:extLst>
-              <p:ext uri="{386F3935-93C4-4BCD-93E2-E3B085C9AB24}">
-                <p16:designElem xmlns:p16="http://schemas.microsoft.com/office/powerpoint/2015/main" val="1"/>
-              </p:ext>
-            </p:extLst>
-          </p:nvPr>
-        </p:nvSpPr>
-        <p:spPr>
-          <a:xfrm>
-            <a:off x="0" y="0"/>
-            <a:ext cx="12188952" cy="6858000"/>
-          </a:xfrm>
-          <a:prstGeom prst="rect">
-            <a:avLst/>
-          </a:prstGeom>
-          <a:ln>
-            <a:noFill/>
-          </a:ln>
-        </p:spPr>
-        <p:style>
-          <a:lnRef idx="2">
-            <a:schemeClr val="accent1">
-              <a:shade val="50000"/>
-            </a:schemeClr>
-          </a:lnRef>
-          <a:fillRef idx="1">
-            <a:schemeClr val="accent1"/>
-          </a:fillRef>
-          <a:effectRef idx="0">
-            <a:schemeClr val="accent1"/>
-          </a:effectRef>
-          <a:fontRef idx="minor">
-            <a:schemeClr val="lt1"/>
-          </a:fontRef>
-        </p:style>
-        <p:txBody>
-          <a:bodyPr rtlCol="0" anchor="ctr"/>
-          <a:lstStyle/>
-          <a:p>
-            <a:pPr algn="ctr"/>
-            <a:endParaRPr lang="en-US"/>
-          </a:p>
-        </p:txBody>
-      </p:sp>
-      <p:sp>
-        <p:nvSpPr>
-          <p:cNvPr id="1047" name="Arc 1046">
-            <a:extLst>
-              <a:ext uri="{FF2B5EF4-FFF2-40B4-BE49-F238E27FC236}">
-                <a16:creationId xmlns:a16="http://schemas.microsoft.com/office/drawing/2014/main" id="{70BEB1E7-2F88-40BC-B73D-42E5B6F80BFC}"/>
-              </a:ext>
-              <a:ext uri="{C183D7F6-B498-43B3-948B-1728B52AA6E4}">
-                <adec:decorative xmlns:adec="http://schemas.microsoft.com/office/drawing/2017/decorative" val="1"/>
-              </a:ext>
-            </a:extLst>
-          </p:cNvPr>
-          <p:cNvSpPr>
-            <a:spLocks noGrp="1" noRot="1" noChangeAspect="1" noMove="1" noResize="1" noEditPoints="1" noAdjustHandles="1" noChangeArrowheads="1" noChangeShapeType="1" noTextEdit="1"/>
-          </p:cNvSpPr>
-          <p:nvPr>
-            <p:extLst>
-              <p:ext uri="{386F3935-93C4-4BCD-93E2-E3B085C9AB24}">
-                <p16:designElem xmlns:p16="http://schemas.microsoft.com/office/powerpoint/2015/main" val="1"/>
-              </p:ext>
-            </p:extLst>
-          </p:nvPr>
-        </p:nvSpPr>
-        <p:spPr>
-          <a:xfrm rot="5640269" flipV="1">
-            <a:off x="5586861" y="-553943"/>
-            <a:ext cx="3944178" cy="3944178"/>
-          </a:xfrm>
-          <a:prstGeom prst="arc">
-            <a:avLst>
-              <a:gd name="adj1" fmla="val 16200000"/>
-              <a:gd name="adj2" fmla="val 20093138"/>
-            </a:avLst>
-          </a:prstGeom>
-          <a:ln w="127000" cap="rnd">
-            <a:solidFill>
-              <a:schemeClr val="accent4"/>
-            </a:solidFill>
-            <a:prstDash val="dash"/>
-          </a:ln>
-        </p:spPr>
-        <p:style>
-          <a:lnRef idx="1">
-            <a:schemeClr val="accent1"/>
-          </a:lnRef>
-          <a:fillRef idx="0">
-            <a:schemeClr val="accent1"/>
-          </a:fillRef>
-          <a:effectRef idx="0">
-            <a:schemeClr val="accent1"/>
-          </a:effectRef>
-          <a:fontRef idx="minor">
-            <a:schemeClr val="tx1"/>
-          </a:fontRef>
-        </p:style>
-        <p:txBody>
-          <a:bodyPr rtlCol="0" anchor="ctr"/>
-          <a:lstStyle/>
-          <a:p>
-            <a:pPr algn="ctr"/>
-            <a:endParaRPr lang="en-US" dirty="0"/>
-          </a:p>
-        </p:txBody>
-      </p:sp>
-      <p:sp>
-        <p:nvSpPr>
-          <p:cNvPr id="5" name="Title 4">
-            <a:extLst>
-              <a:ext uri="{FF2B5EF4-FFF2-40B4-BE49-F238E27FC236}">
-                <a16:creationId xmlns:a16="http://schemas.microsoft.com/office/drawing/2014/main" id="{85C7A590-29F5-5B52-F34A-C2B313A8BC97}"/>
-              </a:ext>
-            </a:extLst>
-          </p:cNvPr>
-          <p:cNvSpPr>
-            <a:spLocks noGrp="1"/>
-          </p:cNvSpPr>
-          <p:nvPr>
-            <p:ph type="title"/>
-          </p:nvPr>
-        </p:nvSpPr>
-        <p:spPr>
-          <a:xfrm>
-            <a:off x="838201" y="345810"/>
-            <a:ext cx="4795164" cy="1325563"/>
-          </a:xfrm>
-        </p:spPr>
-        <p:txBody>
-          <a:bodyPr vert="horz" lIns="91440" tIns="45720" rIns="91440" bIns="45720" rtlCol="0" anchor="ctr">
-            <a:normAutofit/>
-          </a:bodyPr>
-          <a:lstStyle/>
-          <a:p>
-            <a:r>
-              <a:rPr lang="en-US" kern="1200" dirty="0">
-                <a:solidFill>
-                  <a:schemeClr val="tx1"/>
-                </a:solidFill>
-                <a:latin typeface="+mj-lt"/>
-                <a:ea typeface="+mj-ea"/>
-                <a:cs typeface="+mj-cs"/>
-              </a:rPr>
-              <a:t>About Us/Me</a:t>
-            </a:r>
-          </a:p>
-        </p:txBody>
-      </p:sp>
-      <p:sp>
-        <p:nvSpPr>
-          <p:cNvPr id="7" name="Content Placeholder 6">
-            <a:extLst>
-              <a:ext uri="{FF2B5EF4-FFF2-40B4-BE49-F238E27FC236}">
-                <a16:creationId xmlns:a16="http://schemas.microsoft.com/office/drawing/2014/main" id="{6FE02C89-F575-05AE-2C82-A95E855185EC}"/>
-              </a:ext>
-            </a:extLst>
-          </p:cNvPr>
-          <p:cNvSpPr>
-            <a:spLocks noGrp="1"/>
-          </p:cNvSpPr>
-          <p:nvPr>
-            <p:ph sz="half" idx="2"/>
-          </p:nvPr>
-        </p:nvSpPr>
-        <p:spPr>
-          <a:xfrm>
-            <a:off x="838201" y="1390389"/>
-            <a:ext cx="4795165" cy="4786574"/>
-          </a:xfrm>
-        </p:spPr>
-        <p:txBody>
-          <a:bodyPr vert="horz" lIns="91440" tIns="45720" rIns="91440" bIns="45720" rtlCol="0">
-            <a:normAutofit fontScale="92500" lnSpcReduction="20000"/>
-          </a:bodyPr>
-          <a:lstStyle/>
-          <a:p>
-            <a:pPr marL="0" indent="0">
-              <a:buNone/>
-            </a:pPr>
-            <a:r>
-              <a:rPr lang="en-US" sz="2400" b="1" dirty="0"/>
-              <a:t>Dog </a:t>
-            </a:r>
-            <a:r>
-              <a:rPr lang="en-US" sz="2400" b="1" dirty="0" err="1"/>
-              <a:t>McScruff</a:t>
-            </a:r>
-            <a:r>
-              <a:rPr lang="en-US" sz="2400" b="1" dirty="0"/>
-              <a:t> &amp; Cat </a:t>
-            </a:r>
-            <a:r>
-              <a:rPr lang="en-US" sz="2400" b="1" dirty="0" err="1"/>
-              <a:t>LaFluff</a:t>
-            </a:r>
-            <a:endParaRPr lang="en-US" sz="2400" b="1" dirty="0"/>
-          </a:p>
-          <a:p>
-            <a:pPr marL="0" indent="0">
-              <a:buNone/>
-            </a:pPr>
-            <a:r>
-              <a:rPr lang="en-US" sz="2400" dirty="0"/>
-              <a:t>from The United States of America</a:t>
-            </a:r>
-          </a:p>
-          <a:p>
-            <a:pPr marL="0"/>
-            <a:endParaRPr lang="en-US" sz="2400" dirty="0"/>
-          </a:p>
-          <a:p>
-            <a:pPr marL="0" indent="0">
-              <a:buNone/>
-            </a:pPr>
-            <a:r>
-              <a:rPr lang="en-US" sz="2400" dirty="0"/>
-              <a:t>Dog: </a:t>
-            </a:r>
-          </a:p>
-          <a:p>
-            <a:r>
-              <a:rPr lang="en-US" sz="2400" dirty="0"/>
-              <a:t>Director of Health Economics Research at Vanderbilt University</a:t>
-            </a:r>
-          </a:p>
-          <a:p>
-            <a:r>
-              <a:rPr lang="en-US" sz="2400" dirty="0"/>
-              <a:t>Areas of Interest: Prescription drugs, and Health Care Costs</a:t>
-            </a:r>
-          </a:p>
-          <a:p>
-            <a:endParaRPr lang="en-US" sz="2400" dirty="0"/>
-          </a:p>
-          <a:p>
-            <a:pPr marL="0" indent="0">
-              <a:buNone/>
-            </a:pPr>
-            <a:r>
-              <a:rPr lang="en-US" sz="2400" dirty="0"/>
-              <a:t>Cat:</a:t>
-            </a:r>
-          </a:p>
-          <a:p>
-            <a:r>
-              <a:rPr lang="en-US" sz="2400" dirty="0"/>
-              <a:t>Health resources specialist at the United States Department of Health</a:t>
-            </a:r>
-          </a:p>
-          <a:p>
-            <a:r>
-              <a:rPr lang="en-US" sz="2400" dirty="0"/>
-              <a:t>Areas of Interest: Cancer medication, and community health</a:t>
-            </a:r>
-          </a:p>
-        </p:txBody>
-      </p:sp>
-      <p:pic>
-        <p:nvPicPr>
-          <p:cNvPr id="1032" name="Picture 8" descr="Ragdoll Kitten Red Toy Car On Stock Photo 50587753 | Shutterstock">
-            <a:extLst>
-              <a:ext uri="{FF2B5EF4-FFF2-40B4-BE49-F238E27FC236}">
-                <a16:creationId xmlns:a16="http://schemas.microsoft.com/office/drawing/2014/main" id="{19A2897B-675B-15BE-3253-28475682EFC2}"/>
-              </a:ext>
-            </a:extLst>
-          </p:cNvPr>
-          <p:cNvPicPr>
-            <a:picLocks noChangeAspect="1" noChangeArrowheads="1"/>
-          </p:cNvPicPr>
-          <p:nvPr/>
-        </p:nvPicPr>
-        <p:blipFill rotWithShape="1">
-          <a:blip r:embed="rId2">
-            <a:extLst>
-              <a:ext uri="{28A0092B-C50C-407E-A947-70E740481C1C}">
-                <a14:useLocalDpi xmlns:a14="http://schemas.microsoft.com/office/drawing/2010/main" val="0"/>
-              </a:ext>
-            </a:extLst>
-          </a:blip>
-          <a:srcRect l="3248" t="-6195" r="14141" b="6192"/>
-          <a:stretch>
-            <a:fillRect/>
-          </a:stretch>
-        </p:blipFill>
-        <p:spPr bwMode="auto">
-          <a:xfrm>
-            <a:off x="5988784" y="-180000"/>
-            <a:ext cx="3343282" cy="2905636"/>
-          </a:xfrm>
-          <a:custGeom>
-            <a:avLst/>
-            <a:gdLst/>
-            <a:ahLst/>
-            <a:cxnLst/>
-            <a:rect l="l" t="t" r="r" b="b"/>
-            <a:pathLst>
-              <a:path w="3343282" h="2905646">
-                <a:moveTo>
-                  <a:pt x="546801" y="0"/>
-                </a:moveTo>
-                <a:lnTo>
-                  <a:pt x="2796481" y="0"/>
-                </a:lnTo>
-                <a:lnTo>
-                  <a:pt x="2853670" y="51976"/>
-                </a:lnTo>
-                <a:cubicBezTo>
-                  <a:pt x="3156177" y="354484"/>
-                  <a:pt x="3343282" y="772394"/>
-                  <a:pt x="3343282" y="1234005"/>
-                </a:cubicBezTo>
-                <a:cubicBezTo>
-                  <a:pt x="3343282" y="2157227"/>
-                  <a:pt x="2594863" y="2905646"/>
-                  <a:pt x="1671641" y="2905646"/>
-                </a:cubicBezTo>
-                <a:cubicBezTo>
-                  <a:pt x="748420" y="2905646"/>
-                  <a:pt x="0" y="2157227"/>
-                  <a:pt x="0" y="1234005"/>
-                </a:cubicBezTo>
-                <a:cubicBezTo>
-                  <a:pt x="0" y="772394"/>
-                  <a:pt x="187105" y="354484"/>
-                  <a:pt x="489613" y="51976"/>
-                </a:cubicBezTo>
-                <a:close/>
-              </a:path>
-            </a:pathLst>
-          </a:custGeom>
-          <a:noFill/>
-          <a:extLst>
-            <a:ext uri="{909E8E84-426E-40DD-AFC4-6F175D3DCCD1}">
-              <a14:hiddenFill xmlns:a14="http://schemas.microsoft.com/office/drawing/2010/main">
-                <a:solidFill>
-                  <a:srgbClr val="FFFFFF"/>
-                </a:solidFill>
-              </a14:hiddenFill>
-            </a:ext>
-          </a:extLst>
-        </p:spPr>
-      </p:pic>
-      <p:pic>
-        <p:nvPicPr>
-          <p:cNvPr id="1040" name="Picture 16" descr="250+ Dog Soccer Ball Jack Russell Terrier Stock Photos, Pictures &amp;  Royalty-Free Images - iStock">
-            <a:extLst>
-              <a:ext uri="{FF2B5EF4-FFF2-40B4-BE49-F238E27FC236}">
-                <a16:creationId xmlns:a16="http://schemas.microsoft.com/office/drawing/2014/main" id="{123568D1-662F-D4FE-6E16-CCF14490FFA2}"/>
-              </a:ext>
-            </a:extLst>
-          </p:cNvPr>
-          <p:cNvPicPr>
-            <a:picLocks noChangeAspect="1" noChangeArrowheads="1"/>
-          </p:cNvPicPr>
-          <p:nvPr/>
-        </p:nvPicPr>
-        <p:blipFill rotWithShape="1">
-          <a:blip r:embed="rId3">
-            <a:extLst>
-              <a:ext uri="{28A0092B-C50C-407E-A947-70E740481C1C}">
-                <a14:useLocalDpi xmlns:a14="http://schemas.microsoft.com/office/drawing/2010/main" val="0"/>
-              </a:ext>
-            </a:extLst>
-          </a:blip>
-          <a:srcRect l="5006" r="22339" b="-3"/>
-          <a:stretch>
-            <a:fillRect/>
-          </a:stretch>
-        </p:blipFill>
-        <p:spPr bwMode="auto">
-          <a:xfrm>
-            <a:off x="6172241" y="3154859"/>
-            <a:ext cx="4030579" cy="3703141"/>
-          </a:xfrm>
-          <a:custGeom>
-            <a:avLst/>
-            <a:gdLst/>
-            <a:ahLst/>
-            <a:cxnLst/>
-            <a:rect l="l" t="t" r="r" b="b"/>
-            <a:pathLst>
-              <a:path w="4030579" h="3703141">
-                <a:moveTo>
-                  <a:pt x="2015289" y="0"/>
-                </a:moveTo>
-                <a:cubicBezTo>
-                  <a:pt x="3128303" y="0"/>
-                  <a:pt x="4030579" y="902277"/>
-                  <a:pt x="4030579" y="2015290"/>
-                </a:cubicBezTo>
-                <a:cubicBezTo>
-                  <a:pt x="4030579" y="2710923"/>
-                  <a:pt x="3678127" y="3324237"/>
-                  <a:pt x="3142057" y="3686399"/>
-                </a:cubicBezTo>
-                <a:lnTo>
-                  <a:pt x="3114499" y="3703141"/>
-                </a:lnTo>
-                <a:lnTo>
-                  <a:pt x="916080" y="3703141"/>
-                </a:lnTo>
-                <a:lnTo>
-                  <a:pt x="888522" y="3686399"/>
-                </a:lnTo>
-                <a:cubicBezTo>
-                  <a:pt x="352452" y="3324237"/>
-                  <a:pt x="0" y="2710923"/>
-                  <a:pt x="0" y="2015290"/>
-                </a:cubicBezTo>
-                <a:cubicBezTo>
-                  <a:pt x="0" y="902277"/>
-                  <a:pt x="902277" y="0"/>
-                  <a:pt x="2015289" y="0"/>
-                </a:cubicBezTo>
-                <a:close/>
-              </a:path>
-            </a:pathLst>
-          </a:custGeom>
-          <a:noFill/>
-          <a:extLst>
-            <a:ext uri="{909E8E84-426E-40DD-AFC4-6F175D3DCCD1}">
-              <a14:hiddenFill xmlns:a14="http://schemas.microsoft.com/office/drawing/2010/main">
-                <a:solidFill>
-                  <a:srgbClr val="FFFFFF"/>
-                </a:solidFill>
-              </a14:hiddenFill>
-            </a:ext>
-          </a:extLst>
-        </p:spPr>
-      </p:pic>
-      <p:pic>
-        <p:nvPicPr>
-          <p:cNvPr id="1034" name="Picture 10" descr="430+ Work From Home Funny Dog Stock Photos, Pictures &amp; Royalty-Free Images  - iStock">
-            <a:extLst>
-              <a:ext uri="{FF2B5EF4-FFF2-40B4-BE49-F238E27FC236}">
-                <a16:creationId xmlns:a16="http://schemas.microsoft.com/office/drawing/2014/main" id="{6BA49772-8B1A-A742-C3EB-36319AB8AC7C}"/>
-              </a:ext>
-            </a:extLst>
-          </p:cNvPr>
-          <p:cNvPicPr>
-            <a:picLocks noChangeAspect="1" noChangeArrowheads="1"/>
-          </p:cNvPicPr>
-          <p:nvPr/>
-        </p:nvPicPr>
-        <p:blipFill rotWithShape="1">
-          <a:blip r:embed="rId4">
-            <a:extLst>
-              <a:ext uri="{28A0092B-C50C-407E-A947-70E740481C1C}">
-                <a14:useLocalDpi xmlns:a14="http://schemas.microsoft.com/office/drawing/2010/main" val="0"/>
-              </a:ext>
-            </a:extLst>
-          </a:blip>
-          <a:srcRect l="33553" r="20351" b="2"/>
-          <a:stretch>
-            <a:fillRect/>
-          </a:stretch>
-        </p:blipFill>
-        <p:spPr bwMode="auto">
-          <a:xfrm>
-            <a:off x="9523005" y="10"/>
-            <a:ext cx="2668994" cy="3864758"/>
-          </a:xfrm>
-          <a:custGeom>
-            <a:avLst/>
-            <a:gdLst/>
-            <a:ahLst/>
-            <a:cxnLst/>
-            <a:rect l="l" t="t" r="r" b="b"/>
-            <a:pathLst>
-              <a:path w="2668994" h="3864768">
-                <a:moveTo>
-                  <a:pt x="1215406" y="0"/>
-                </a:moveTo>
-                <a:lnTo>
-                  <a:pt x="2668994" y="0"/>
-                </a:lnTo>
-                <a:lnTo>
-                  <a:pt x="2668994" y="3754247"/>
-                </a:lnTo>
-                <a:lnTo>
-                  <a:pt x="2614574" y="3774165"/>
-                </a:lnTo>
-                <a:cubicBezTo>
-                  <a:pt x="2425260" y="3833048"/>
-                  <a:pt x="2223979" y="3864768"/>
-                  <a:pt x="2015289" y="3864768"/>
-                </a:cubicBezTo>
-                <a:cubicBezTo>
-                  <a:pt x="902276" y="3864768"/>
-                  <a:pt x="0" y="2962492"/>
-                  <a:pt x="0" y="1849479"/>
-                </a:cubicBezTo>
-                <a:cubicBezTo>
-                  <a:pt x="0" y="1084283"/>
-                  <a:pt x="426467" y="418692"/>
-                  <a:pt x="1054683" y="77425"/>
-                </a:cubicBezTo>
-                <a:close/>
-              </a:path>
-            </a:pathLst>
-          </a:custGeom>
-          <a:noFill/>
-          <a:extLst>
-            <a:ext uri="{909E8E84-426E-40DD-AFC4-6F175D3DCCD1}">
-              <a14:hiddenFill xmlns:a14="http://schemas.microsoft.com/office/drawing/2010/main">
-                <a:solidFill>
-                  <a:srgbClr val="FFFFFF"/>
-                </a:solidFill>
-              </a14:hiddenFill>
-            </a:ext>
-          </a:extLst>
-        </p:spPr>
-      </p:pic>
-      <p:pic>
-        <p:nvPicPr>
-          <p:cNvPr id="1026" name="Picture 2" descr="ragdoll kittens for sale seal bicolor">
-            <a:extLst>
-              <a:ext uri="{FF2B5EF4-FFF2-40B4-BE49-F238E27FC236}">
-                <a16:creationId xmlns:a16="http://schemas.microsoft.com/office/drawing/2014/main" id="{BF20AF6C-C76B-07DD-F5F7-83781603DED8}"/>
-              </a:ext>
-            </a:extLst>
-          </p:cNvPr>
-          <p:cNvPicPr>
-            <a:picLocks noChangeAspect="1" noChangeArrowheads="1"/>
-          </p:cNvPicPr>
-          <p:nvPr/>
-        </p:nvPicPr>
-        <p:blipFill>
-          <a:blip r:embed="rId5">
-            <a:extLst>
-              <a:ext uri="{28A0092B-C50C-407E-A947-70E740481C1C}">
-                <a14:useLocalDpi xmlns:a14="http://schemas.microsoft.com/office/drawing/2010/main" val="0"/>
-              </a:ext>
-            </a:extLst>
-          </a:blip>
-          <a:srcRect l="14868" r="22552" b="3"/>
-          <a:stretch>
-            <a:fillRect/>
-          </a:stretch>
-        </p:blipFill>
-        <p:spPr bwMode="auto">
-          <a:xfrm>
-            <a:off x="10404210" y="4001294"/>
-            <a:ext cx="1787791" cy="2856706"/>
-          </a:xfrm>
-          <a:custGeom>
-            <a:avLst/>
-            <a:gdLst/>
-            <a:ahLst/>
-            <a:cxnLst/>
-            <a:rect l="l" t="t" r="r" b="b"/>
-            <a:pathLst>
-              <a:path w="1787791" h="2856706">
-                <a:moveTo>
-                  <a:pt x="1531941" y="0"/>
-                </a:moveTo>
-                <a:cubicBezTo>
-                  <a:pt x="1584820" y="0"/>
-                  <a:pt x="1637074" y="2679"/>
-                  <a:pt x="1688573" y="7909"/>
-                </a:cubicBezTo>
-                <a:lnTo>
-                  <a:pt x="1787791" y="23052"/>
-                </a:lnTo>
-                <a:lnTo>
-                  <a:pt x="1787791" y="2856706"/>
-                </a:lnTo>
-                <a:lnTo>
-                  <a:pt x="765053" y="2856706"/>
-                </a:lnTo>
-                <a:lnTo>
-                  <a:pt x="675418" y="2802252"/>
-                </a:lnTo>
-                <a:cubicBezTo>
-                  <a:pt x="267919" y="2526951"/>
-                  <a:pt x="0" y="2060735"/>
-                  <a:pt x="0" y="1531942"/>
-                </a:cubicBezTo>
-                <a:cubicBezTo>
-                  <a:pt x="0" y="685873"/>
-                  <a:pt x="685873" y="0"/>
-                  <a:pt x="1531941" y="0"/>
-                </a:cubicBezTo>
-                <a:close/>
-              </a:path>
-            </a:pathLst>
-          </a:custGeom>
-          <a:noFill/>
-          <a:extLst>
-            <a:ext uri="{909E8E84-426E-40DD-AFC4-6F175D3DCCD1}">
-              <a14:hiddenFill xmlns:a14="http://schemas.microsoft.com/office/drawing/2010/main">
-                <a:solidFill>
-                  <a:srgbClr val="FFFFFF"/>
-                </a:solidFill>
-              </a14:hiddenFill>
-            </a:ext>
-          </a:extLst>
-        </p:spPr>
-      </p:pic>
-    </p:spTree>
-    <p:extLst>
-      <p:ext uri="{BB962C8B-B14F-4D97-AF65-F5344CB8AC3E}">
-        <p14:creationId xmlns:p14="http://schemas.microsoft.com/office/powerpoint/2010/main" val="1296911313"/>
-      </p:ext>
-    </p:extLst>
-  </p:cSld>
-  <p:clrMapOvr>
-    <a:masterClrMapping/>
-  </p:clrMapOvr>
-</p:sld>
-</file>
-
-<file path=ppt/slides/slide4.xml><?xml version="1.0" encoding="utf-8"?>
-<p:sld xmlns:a="http://schemas.openxmlformats.org/drawingml/2006/main" xmlns:r="http://schemas.openxmlformats.org/officeDocument/2006/relationships" xmlns:p="http://schemas.openxmlformats.org/presentationml/2006/main">
-  <p:cSld>
-    <p:spTree>
-      <p:nvGrpSpPr>
-        <p:cNvPr id="1" name=""/>
-        <p:cNvGrpSpPr/>
-        <p:nvPr/>
-      </p:nvGrpSpPr>
-      <p:grpSpPr>
-        <a:xfrm>
-          <a:off x="0" y="0"/>
-          <a:ext cx="0" cy="0"/>
-          <a:chOff x="0" y="0"/>
-          <a:chExt cx="0" cy="0"/>
-        </a:xfrm>
-      </p:grpSpPr>
-      <p:sp>
-        <p:nvSpPr>
-          <p:cNvPr id="2" name="Title 1">
-            <a:extLst>
-              <a:ext uri="{FF2B5EF4-FFF2-40B4-BE49-F238E27FC236}">
-                <a16:creationId xmlns:a16="http://schemas.microsoft.com/office/drawing/2014/main" id="{6D4B9C87-93D0-9CF2-5979-AC8ABE5F97DD}"/>
-              </a:ext>
-            </a:extLst>
-          </p:cNvPr>
-          <p:cNvSpPr>
-            <a:spLocks noGrp="1"/>
-          </p:cNvSpPr>
-          <p:nvPr>
-            <p:ph type="title"/>
-          </p:nvPr>
-        </p:nvSpPr>
-        <p:spPr/>
-        <p:txBody>
-          <a:bodyPr/>
-          <a:lstStyle/>
-          <a:p>
-            <a:r>
-              <a:rPr lang="en-US" dirty="0"/>
-              <a:t>Introduction</a:t>
-            </a:r>
-          </a:p>
-        </p:txBody>
-      </p:sp>
-      <p:sp>
-        <p:nvSpPr>
-          <p:cNvPr id="5" name="Text Placeholder 4">
-            <a:extLst>
-              <a:ext uri="{FF2B5EF4-FFF2-40B4-BE49-F238E27FC236}">
-                <a16:creationId xmlns:a16="http://schemas.microsoft.com/office/drawing/2014/main" id="{7C6AB1CD-5176-DAA9-A27D-B93EC0C3AF81}"/>
-              </a:ext>
-            </a:extLst>
-          </p:cNvPr>
-          <p:cNvSpPr>
-            <a:spLocks noGrp="1"/>
-          </p:cNvSpPr>
-          <p:nvPr>
-            <p:ph type="body" idx="1"/>
-          </p:nvPr>
-        </p:nvSpPr>
-        <p:spPr/>
-        <p:txBody>
-          <a:bodyPr/>
-          <a:lstStyle/>
-          <a:p>
-            <a:r>
-              <a:rPr lang="en-US" dirty="0"/>
-              <a:t>Disease Overview</a:t>
-            </a:r>
-          </a:p>
-        </p:txBody>
-      </p:sp>
-      <p:sp>
-        <p:nvSpPr>
-          <p:cNvPr id="3" name="Content Placeholder 2">
-            <a:extLst>
-              <a:ext uri="{FF2B5EF4-FFF2-40B4-BE49-F238E27FC236}">
-                <a16:creationId xmlns:a16="http://schemas.microsoft.com/office/drawing/2014/main" id="{AC8405D0-A0AD-44F3-C2EB-FC1828519072}"/>
-              </a:ext>
-            </a:extLst>
-          </p:cNvPr>
-          <p:cNvSpPr>
-            <a:spLocks noGrp="1"/>
-          </p:cNvSpPr>
-          <p:nvPr>
-            <p:ph sz="half" idx="2"/>
-          </p:nvPr>
-        </p:nvSpPr>
-        <p:spPr>
-          <a:xfrm>
-            <a:off x="839788" y="2505075"/>
-            <a:ext cx="4960377" cy="3684588"/>
-          </a:xfrm>
-        </p:spPr>
-        <p:txBody>
-          <a:bodyPr/>
-          <a:lstStyle/>
-          <a:p>
-            <a:r>
-              <a:rPr lang="en-US" dirty="0"/>
-              <a:t>Disease A</a:t>
-            </a:r>
-          </a:p>
-          <a:p>
-            <a:pPr lvl="1"/>
-            <a:r>
-              <a:rPr lang="en-US" dirty="0"/>
-              <a:t>Needs treatment by medication</a:t>
-            </a:r>
-          </a:p>
-          <a:p>
-            <a:pPr lvl="1"/>
-            <a:r>
-              <a:rPr lang="en-US" dirty="0"/>
-              <a:t>High risk of death without medication</a:t>
-            </a:r>
-          </a:p>
-          <a:p>
-            <a:pPr lvl="1"/>
-            <a:r>
-              <a:rPr lang="en-US" dirty="0"/>
-              <a:t>Not contagious</a:t>
-            </a:r>
-          </a:p>
-        </p:txBody>
-      </p:sp>
-      <p:sp>
-        <p:nvSpPr>
-          <p:cNvPr id="6" name="Text Placeholder 5">
-            <a:extLst>
-              <a:ext uri="{FF2B5EF4-FFF2-40B4-BE49-F238E27FC236}">
-                <a16:creationId xmlns:a16="http://schemas.microsoft.com/office/drawing/2014/main" id="{0E76D70D-2D80-D440-546D-9FEC71549403}"/>
-              </a:ext>
-            </a:extLst>
-          </p:cNvPr>
-          <p:cNvSpPr>
-            <a:spLocks noGrp="1"/>
-          </p:cNvSpPr>
-          <p:nvPr>
-            <p:ph type="body" sz="quarter" idx="3"/>
-          </p:nvPr>
-        </p:nvSpPr>
-        <p:spPr/>
-        <p:txBody>
-          <a:bodyPr/>
-          <a:lstStyle/>
-          <a:p>
-            <a:r>
-              <a:rPr lang="en-US" dirty="0"/>
-              <a:t>Importance to Country</a:t>
-            </a:r>
-          </a:p>
-        </p:txBody>
-      </p:sp>
-      <p:sp>
-        <p:nvSpPr>
-          <p:cNvPr id="7" name="Content Placeholder 6">
-            <a:extLst>
-              <a:ext uri="{FF2B5EF4-FFF2-40B4-BE49-F238E27FC236}">
-                <a16:creationId xmlns:a16="http://schemas.microsoft.com/office/drawing/2014/main" id="{1EEFB142-11E3-0814-D3D9-D75281ADDDCD}"/>
-              </a:ext>
-            </a:extLst>
-          </p:cNvPr>
-          <p:cNvSpPr>
-            <a:spLocks noGrp="1"/>
-          </p:cNvSpPr>
-          <p:nvPr>
-            <p:ph sz="quarter" idx="4"/>
-          </p:nvPr>
-        </p:nvSpPr>
-        <p:spPr/>
-        <p:txBody>
-          <a:bodyPr/>
-          <a:lstStyle/>
-          <a:p>
-            <a:r>
-              <a:rPr lang="en-US" dirty="0"/>
-              <a:t>Disease A is common cause of death </a:t>
-            </a:r>
-          </a:p>
-          <a:p>
-            <a:r>
-              <a:rPr lang="en-US" dirty="0"/>
-              <a:t>Medication is high cost so figuring out the best balance for prescribing will save lives and money.</a:t>
-            </a:r>
-          </a:p>
-          <a:p>
-            <a:endParaRPr lang="en-US" dirty="0"/>
-          </a:p>
-        </p:txBody>
-      </p:sp>
-    </p:spTree>
-    <p:extLst>
-      <p:ext uri="{BB962C8B-B14F-4D97-AF65-F5344CB8AC3E}">
-        <p14:creationId xmlns:p14="http://schemas.microsoft.com/office/powerpoint/2010/main" val="1587268627"/>
-      </p:ext>
-    </p:extLst>
-  </p:cSld>
-  <p:clrMapOvr>
-    <a:masterClrMapping/>
-  </p:clrMapOvr>
-</p:sld>
-</file>
-
-<file path=ppt/slides/slide5.xml><?xml version="1.0" encoding="utf-8"?>
-<p:sld xmlns:a="http://schemas.openxmlformats.org/drawingml/2006/main" xmlns:r="http://schemas.openxmlformats.org/officeDocument/2006/relationships" xmlns:p="http://schemas.openxmlformats.org/presentationml/2006/main">
-  <p:cSld>
-    <p:spTree>
-      <p:nvGrpSpPr>
-        <p:cNvPr id="1" name=""/>
-        <p:cNvGrpSpPr/>
-        <p:nvPr/>
-      </p:nvGrpSpPr>
-      <p:grpSpPr>
-        <a:xfrm>
-          <a:off x="0" y="0"/>
-          <a:ext cx="0" cy="0"/>
-          <a:chOff x="0" y="0"/>
-          <a:chExt cx="0" cy="0"/>
-        </a:xfrm>
-      </p:grpSpPr>
-      <p:sp>
-        <p:nvSpPr>
-          <p:cNvPr id="2" name="Title 1">
-            <a:extLst>
-              <a:ext uri="{FF2B5EF4-FFF2-40B4-BE49-F238E27FC236}">
-                <a16:creationId xmlns:a16="http://schemas.microsoft.com/office/drawing/2014/main" id="{84771C47-9E57-231D-C25C-66C2E99FBF88}"/>
-              </a:ext>
-            </a:extLst>
-          </p:cNvPr>
-          <p:cNvSpPr>
-            <a:spLocks noGrp="1"/>
-          </p:cNvSpPr>
-          <p:nvPr>
-            <p:ph type="title"/>
-          </p:nvPr>
-        </p:nvSpPr>
-        <p:spPr/>
-        <p:txBody>
-          <a:bodyPr/>
-          <a:lstStyle/>
-          <a:p>
-            <a:r>
-              <a:rPr lang="en-US" dirty="0"/>
-              <a:t>Strategies to Compare</a:t>
-            </a:r>
-          </a:p>
-        </p:txBody>
-      </p:sp>
-      <p:sp>
-        <p:nvSpPr>
-          <p:cNvPr id="4" name="Content Placeholder 3">
-            <a:extLst>
-              <a:ext uri="{FF2B5EF4-FFF2-40B4-BE49-F238E27FC236}">
-                <a16:creationId xmlns:a16="http://schemas.microsoft.com/office/drawing/2014/main" id="{872C1E3A-6FF4-1BCF-A06D-59095EF3116D}"/>
-              </a:ext>
-            </a:extLst>
-          </p:cNvPr>
-          <p:cNvSpPr>
-            <a:spLocks noGrp="1"/>
-          </p:cNvSpPr>
-          <p:nvPr>
-            <p:ph idx="1"/>
-          </p:nvPr>
-        </p:nvSpPr>
-        <p:spPr/>
-        <p:txBody>
-          <a:bodyPr/>
-          <a:lstStyle/>
-          <a:p>
-            <a:pPr fontAlgn="ctr"/>
-            <a:r>
-              <a:rPr lang="en-US" dirty="0"/>
-              <a:t>Status Quo: Prescribe after a week of symptoms</a:t>
-            </a:r>
-          </a:p>
-          <a:p>
-            <a:pPr fontAlgn="ctr"/>
-            <a:r>
-              <a:rPr lang="en-US" dirty="0"/>
-              <a:t>Strategy 1: Prescribe after 72 hours of symptoms</a:t>
-            </a:r>
-          </a:p>
-          <a:p>
-            <a:r>
-              <a:rPr lang="en-US" dirty="0"/>
-              <a:t>Strategy 2: Prescribe after 24 hours of symptoms</a:t>
-            </a:r>
-          </a:p>
-          <a:p>
-            <a:endParaRPr lang="en-US" dirty="0"/>
-          </a:p>
-          <a:p>
-            <a:pPr marL="0" indent="0">
-              <a:buNone/>
-            </a:pPr>
-            <a:r>
-              <a:rPr lang="en-US" dirty="0"/>
-              <a:t>We want to compare these strategies because as time from symptoms goes us the risk of death increases. However, if we prescribe too often people who don’t need the medication to heal can get bad side-effects and lots of money will be spent on the high-cost drug.</a:t>
-            </a:r>
-          </a:p>
-        </p:txBody>
-      </p:sp>
-    </p:spTree>
-    <p:extLst>
-      <p:ext uri="{BB962C8B-B14F-4D97-AF65-F5344CB8AC3E}">
-        <p14:creationId xmlns:p14="http://schemas.microsoft.com/office/powerpoint/2010/main" val="604342394"/>
-      </p:ext>
-    </p:extLst>
-  </p:cSld>
-  <p:clrMapOvr>
-    <a:masterClrMapping/>
-  </p:clrMapOvr>
-</p:sld>
-</file>
-
-<file path=ppt/slides/slide6.xml><?xml version="1.0" encoding="utf-8"?>
-<p:sld xmlns:a="http://schemas.openxmlformats.org/drawingml/2006/main" xmlns:r="http://schemas.openxmlformats.org/officeDocument/2006/relationships" xmlns:p="http://schemas.openxmlformats.org/presentationml/2006/main">
-  <p:cSld>
-    <p:bg>
-      <p:bgPr>
-        <a:solidFill>
-          <a:schemeClr val="tx1"/>
-        </a:solidFill>
-        <a:effectLst/>
-      </p:bgPr>
-    </p:bg>
-    <p:spTree>
-      <p:nvGrpSpPr>
-        <p:cNvPr id="1" name="">
-          <a:extLst>
-            <a:ext uri="{FF2B5EF4-FFF2-40B4-BE49-F238E27FC236}">
-              <a16:creationId xmlns:a16="http://schemas.microsoft.com/office/drawing/2014/main" id="{A40012DB-3064-63E4-878B-4DF5EBFA58A6}"/>
-            </a:ext>
-          </a:extLst>
-        </p:cNvPr>
-        <p:cNvGrpSpPr/>
-        <p:nvPr/>
-      </p:nvGrpSpPr>
-      <p:grpSpPr>
-        <a:xfrm>
-          <a:off x="0" y="0"/>
-          <a:ext cx="0" cy="0"/>
-          <a:chOff x="0" y="0"/>
-          <a:chExt cx="0" cy="0"/>
-        </a:xfrm>
-      </p:grpSpPr>
-      <p:sp>
-        <p:nvSpPr>
-          <p:cNvPr id="2" name="Title 1">
-            <a:extLst>
-              <a:ext uri="{FF2B5EF4-FFF2-40B4-BE49-F238E27FC236}">
-                <a16:creationId xmlns:a16="http://schemas.microsoft.com/office/drawing/2014/main" id="{0D220724-CB21-8512-9CA1-72E3238713E6}"/>
-              </a:ext>
-            </a:extLst>
-          </p:cNvPr>
-          <p:cNvSpPr>
-            <a:spLocks noGrp="1"/>
-          </p:cNvSpPr>
-          <p:nvPr>
-            <p:ph type="ctrTitle"/>
-          </p:nvPr>
-        </p:nvSpPr>
-        <p:spPr>
-          <a:xfrm>
-            <a:off x="1524000" y="2235200"/>
-            <a:ext cx="9144000" cy="2387600"/>
-          </a:xfrm>
-        </p:spPr>
-        <p:txBody>
-          <a:bodyPr/>
-          <a:lstStyle/>
-          <a:p>
-            <a:r>
-              <a:rPr lang="en-US" dirty="0">
-                <a:solidFill>
-                  <a:schemeClr val="bg1"/>
-                </a:solidFill>
-              </a:rPr>
-              <a:t>BLANK SLIDES</a:t>
-            </a:r>
-          </a:p>
-        </p:txBody>
-      </p:sp>
-    </p:spTree>
-    <p:extLst>
-      <p:ext uri="{BB962C8B-B14F-4D97-AF65-F5344CB8AC3E}">
-        <p14:creationId xmlns:p14="http://schemas.microsoft.com/office/powerpoint/2010/main" val="2568067408"/>
-      </p:ext>
-    </p:extLst>
-  </p:cSld>
-  <p:clrMapOvr>
-    <a:masterClrMapping/>
-  </p:clrMapOvr>
-</p:sld>
-</file>
-
-<file path=ppt/slides/slide7.xml><?xml version="1.0" encoding="utf-8"?>
-<p:sld xmlns:a="http://schemas.openxmlformats.org/drawingml/2006/main" xmlns:r="http://schemas.openxmlformats.org/officeDocument/2006/relationships" xmlns:p="http://schemas.openxmlformats.org/presentationml/2006/main">
-  <p:cSld>
-    <p:spTree>
-      <p:nvGrpSpPr>
-        <p:cNvPr id="1" name="">
-          <a:extLst>
-            <a:ext uri="{FF2B5EF4-FFF2-40B4-BE49-F238E27FC236}">
-              <a16:creationId xmlns:a16="http://schemas.microsoft.com/office/drawing/2014/main" id="{E61E32A3-9483-7DEB-B8AD-BBC58F7160C3}"/>
-            </a:ext>
-          </a:extLst>
-        </p:cNvPr>
-        <p:cNvGrpSpPr/>
-        <p:nvPr/>
-      </p:nvGrpSpPr>
-      <p:grpSpPr>
-        <a:xfrm>
-          <a:off x="0" y="0"/>
-          <a:ext cx="0" cy="0"/>
-          <a:chOff x="0" y="0"/>
-          <a:chExt cx="0" cy="0"/>
-        </a:xfrm>
-      </p:grpSpPr>
-      <p:sp>
-        <p:nvSpPr>
-          <p:cNvPr id="2" name="Title 1">
-            <a:extLst>
-              <a:ext uri="{FF2B5EF4-FFF2-40B4-BE49-F238E27FC236}">
-                <a16:creationId xmlns:a16="http://schemas.microsoft.com/office/drawing/2014/main" id="{05013A32-7141-0879-891D-EC674813BD29}"/>
-              </a:ext>
-            </a:extLst>
-          </p:cNvPr>
-          <p:cNvSpPr>
-            <a:spLocks noGrp="1"/>
-          </p:cNvSpPr>
-          <p:nvPr>
-            <p:ph type="ctrTitle"/>
-          </p:nvPr>
-        </p:nvSpPr>
-        <p:spPr/>
-        <p:txBody>
-          <a:bodyPr/>
-          <a:lstStyle/>
-          <a:p>
-            <a:r>
-              <a:rPr lang="en-US" dirty="0"/>
-              <a:t>[Title of Project]</a:t>
-            </a:r>
-          </a:p>
-        </p:txBody>
-      </p:sp>
-      <p:sp>
-        <p:nvSpPr>
-          <p:cNvPr id="3" name="Subtitle 2">
-            <a:extLst>
-              <a:ext uri="{FF2B5EF4-FFF2-40B4-BE49-F238E27FC236}">
-                <a16:creationId xmlns:a16="http://schemas.microsoft.com/office/drawing/2014/main" id="{766A7B2F-C8D6-AED5-C920-C92AE710693C}"/>
-              </a:ext>
-            </a:extLst>
-          </p:cNvPr>
-          <p:cNvSpPr>
-            <a:spLocks noGrp="1"/>
-          </p:cNvSpPr>
-          <p:nvPr>
-            <p:ph type="subTitle" idx="1"/>
-          </p:nvPr>
-        </p:nvSpPr>
-        <p:spPr/>
-        <p:txBody>
-          <a:bodyPr/>
-          <a:lstStyle/>
-          <a:p>
-            <a:r>
-              <a:rPr lang="en-US" dirty="0"/>
-              <a:t>Report as of [date]</a:t>
-            </a:r>
-          </a:p>
-        </p:txBody>
-      </p:sp>
-    </p:spTree>
-    <p:extLst>
-      <p:ext uri="{BB962C8B-B14F-4D97-AF65-F5344CB8AC3E}">
-        <p14:creationId xmlns:p14="http://schemas.microsoft.com/office/powerpoint/2010/main" val="2451189273"/>
-      </p:ext>
-    </p:extLst>
-  </p:cSld>
-  <p:clrMapOvr>
-    <a:masterClrMapping/>
-  </p:clrMapOvr>
-</p:sld>
-</file>
-
-<file path=ppt/slides/slide8.xml><?xml version="1.0" encoding="utf-8"?>
-<p:sld xmlns:a="http://schemas.openxmlformats.org/drawingml/2006/main" xmlns:r="http://schemas.openxmlformats.org/officeDocument/2006/relationships" xmlns:p="http://schemas.openxmlformats.org/presentationml/2006/main">
-  <p:cSld>
-    <p:spTree>
-      <p:nvGrpSpPr>
-        <p:cNvPr id="1" name="">
-          <a:extLst>
-            <a:ext uri="{FF2B5EF4-FFF2-40B4-BE49-F238E27FC236}">
-              <a16:creationId xmlns:a16="http://schemas.microsoft.com/office/drawing/2014/main" id="{5079172C-05F2-CB3F-6D33-2EB168C58F6D}"/>
-            </a:ext>
-          </a:extLst>
-        </p:cNvPr>
-        <p:cNvGrpSpPr/>
-        <p:nvPr/>
-      </p:nvGrpSpPr>
-      <p:grpSpPr>
-        <a:xfrm>
-          <a:off x="0" y="0"/>
-          <a:ext cx="0" cy="0"/>
-          <a:chOff x="0" y="0"/>
-          <a:chExt cx="0" cy="0"/>
-        </a:xfrm>
-      </p:grpSpPr>
-      <p:sp>
-        <p:nvSpPr>
-          <p:cNvPr id="5" name="Title 4">
-            <a:extLst>
-              <a:ext uri="{FF2B5EF4-FFF2-40B4-BE49-F238E27FC236}">
-                <a16:creationId xmlns:a16="http://schemas.microsoft.com/office/drawing/2014/main" id="{30DA15DF-1ED7-D89D-76D9-D91D0032DE34}"/>
-              </a:ext>
-            </a:extLst>
-          </p:cNvPr>
-          <p:cNvSpPr>
-            <a:spLocks noGrp="1"/>
-          </p:cNvSpPr>
-          <p:nvPr>
-            <p:ph type="title"/>
-          </p:nvPr>
-        </p:nvSpPr>
-        <p:spPr/>
-        <p:txBody>
-          <a:bodyPr/>
-          <a:lstStyle/>
-          <a:p>
-            <a:r>
-              <a:rPr lang="en-US" dirty="0"/>
-              <a:t>About Me/Us</a:t>
-            </a:r>
-          </a:p>
-        </p:txBody>
-      </p:sp>
-      <p:sp>
-        <p:nvSpPr>
-          <p:cNvPr id="6" name="Content Placeholder 5">
-            <a:extLst>
-              <a:ext uri="{FF2B5EF4-FFF2-40B4-BE49-F238E27FC236}">
-                <a16:creationId xmlns:a16="http://schemas.microsoft.com/office/drawing/2014/main" id="{EE79165C-9045-374F-66A9-5D408DB0BADE}"/>
-              </a:ext>
-            </a:extLst>
-          </p:cNvPr>
-          <p:cNvSpPr>
-            <a:spLocks noGrp="1"/>
-          </p:cNvSpPr>
-          <p:nvPr>
-            <p:ph sz="half" idx="1"/>
-          </p:nvPr>
-        </p:nvSpPr>
-        <p:spPr>
-          <a:xfrm>
-            <a:off x="838200" y="1825625"/>
-            <a:ext cx="5181600" cy="465630"/>
-          </a:xfrm>
-        </p:spPr>
-        <p:txBody>
-          <a:bodyPr>
-            <a:normAutofit lnSpcReduction="10000"/>
-          </a:bodyPr>
-          <a:lstStyle/>
-          <a:p>
-            <a:pPr marL="0" indent="0">
-              <a:buNone/>
-            </a:pPr>
-            <a:r>
-              <a:rPr lang="en-US" dirty="0"/>
-              <a:t>Optional Photo(s) of members</a:t>
-            </a:r>
-          </a:p>
-        </p:txBody>
-      </p:sp>
-      <p:sp>
-        <p:nvSpPr>
-          <p:cNvPr id="7" name="Content Placeholder 6">
-            <a:extLst>
-              <a:ext uri="{FF2B5EF4-FFF2-40B4-BE49-F238E27FC236}">
-                <a16:creationId xmlns:a16="http://schemas.microsoft.com/office/drawing/2014/main" id="{CBD0333F-A113-DE52-AC1C-BDB460F73839}"/>
-              </a:ext>
-            </a:extLst>
-          </p:cNvPr>
-          <p:cNvSpPr>
-            <a:spLocks noGrp="1"/>
-          </p:cNvSpPr>
-          <p:nvPr>
-            <p:ph sz="half" idx="2"/>
-          </p:nvPr>
-        </p:nvSpPr>
-        <p:spPr>
-          <a:xfrm>
-            <a:off x="6172200" y="2900281"/>
-            <a:ext cx="5181600" cy="2576693"/>
-          </a:xfrm>
-        </p:spPr>
-        <p:txBody>
-          <a:bodyPr>
-            <a:normAutofit lnSpcReduction="10000"/>
-          </a:bodyPr>
-          <a:lstStyle/>
-          <a:p>
-            <a:r>
-              <a:rPr lang="en-US" dirty="0"/>
-              <a:t>Name(s)</a:t>
-            </a:r>
-          </a:p>
-          <a:p>
-            <a:r>
-              <a:rPr lang="en-US" dirty="0"/>
-              <a:t>Country</a:t>
-            </a:r>
-          </a:p>
-          <a:p>
-            <a:r>
-              <a:rPr lang="en-US" dirty="0"/>
-              <a:t>Job title(s) &amp; workplace(s)</a:t>
-            </a:r>
-          </a:p>
-          <a:p>
-            <a:r>
-              <a:rPr lang="en-US" dirty="0"/>
-              <a:t>Areas of Focus/Interest</a:t>
-            </a:r>
-          </a:p>
-          <a:p>
-            <a:endParaRPr lang="en-US" dirty="0"/>
-          </a:p>
-        </p:txBody>
-      </p:sp>
-    </p:spTree>
-    <p:extLst>
-      <p:ext uri="{BB962C8B-B14F-4D97-AF65-F5344CB8AC3E}">
-        <p14:creationId xmlns:p14="http://schemas.microsoft.com/office/powerpoint/2010/main" val="1248717342"/>
-      </p:ext>
-    </p:extLst>
-  </p:cSld>
-  <p:clrMapOvr>
-    <a:masterClrMapping/>
-  </p:clrMapOvr>
-</p:sld>
-</file>
-
-<file path=ppt/slides/slide9.xml><?xml version="1.0" encoding="utf-8"?>
-<p:sld xmlns:a="http://schemas.openxmlformats.org/drawingml/2006/main" xmlns:r="http://schemas.openxmlformats.org/officeDocument/2006/relationships" xmlns:p="http://schemas.openxmlformats.org/presentationml/2006/main">
-  <p:cSld>
-    <p:spTree>
-      <p:nvGrpSpPr>
-        <p:cNvPr id="1" name="">
-          <a:extLst>
-            <a:ext uri="{FF2B5EF4-FFF2-40B4-BE49-F238E27FC236}">
               <a16:creationId xmlns:a16="http://schemas.microsoft.com/office/drawing/2014/main" id="{FB605948-F375-7987-DA8D-002E5DABCC6A}"/>
             </a:ext>
           </a:extLst>
@@ -5834,19 +4130,8 @@
                   </a:schemeClr>
                 </a:solidFill>
               </a:rPr>
-              <a:t>MAX 2 SLIDES</a:t>
-            </a:r>
-          </a:p>
-          <a:p>
-            <a:pPr lvl="1"/>
-            <a:endParaRPr lang="en-US" b="1" dirty="0">
-              <a:solidFill>
-                <a:schemeClr val="accent5">
-                  <a:lumMod val="60000"/>
-                  <a:lumOff val="40000"/>
-                </a:schemeClr>
-              </a:solidFill>
-            </a:endParaRPr>
+              <a:t>Keep to 1 slide</a:t>
+            </a:r>
           </a:p>
         </p:txBody>
       </p:sp>
@@ -5854,6 +4139,1908 @@
     <p:extLst>
       <p:ext uri="{BB962C8B-B14F-4D97-AF65-F5344CB8AC3E}">
         <p14:creationId xmlns:p14="http://schemas.microsoft.com/office/powerpoint/2010/main" val="2959274661"/>
+      </p:ext>
+    </p:extLst>
+  </p:cSld>
+  <p:clrMapOvr>
+    <a:masterClrMapping/>
+  </p:clrMapOvr>
+</p:sld>
+</file>
+
+<file path=ppt/slides/slide11.xml><?xml version="1.0" encoding="utf-8"?>
+<p:sld xmlns:a="http://schemas.openxmlformats.org/drawingml/2006/main" xmlns:r="http://schemas.openxmlformats.org/officeDocument/2006/relationships" xmlns:p="http://schemas.openxmlformats.org/presentationml/2006/main">
+  <p:cSld>
+    <p:spTree>
+      <p:nvGrpSpPr>
+        <p:cNvPr id="1" name="">
+          <a:extLst>
+            <a:ext uri="{FF2B5EF4-FFF2-40B4-BE49-F238E27FC236}">
+              <a16:creationId xmlns:a16="http://schemas.microsoft.com/office/drawing/2014/main" id="{FAC43C85-A7EA-2560-EB1E-CCFA3CE510DD}"/>
+            </a:ext>
+          </a:extLst>
+        </p:cNvPr>
+        <p:cNvGrpSpPr/>
+        <p:nvPr/>
+      </p:nvGrpSpPr>
+      <p:grpSpPr>
+        <a:xfrm>
+          <a:off x="0" y="0"/>
+          <a:ext cx="0" cy="0"/>
+          <a:chOff x="0" y="0"/>
+          <a:chExt cx="0" cy="0"/>
+        </a:xfrm>
+      </p:grpSpPr>
+      <p:sp>
+        <p:nvSpPr>
+          <p:cNvPr id="7" name="Title 6">
+            <a:extLst>
+              <a:ext uri="{FF2B5EF4-FFF2-40B4-BE49-F238E27FC236}">
+                <a16:creationId xmlns:a16="http://schemas.microsoft.com/office/drawing/2014/main" id="{B135A460-857B-17B5-0432-37DB040A8177}"/>
+              </a:ext>
+            </a:extLst>
+          </p:cNvPr>
+          <p:cNvSpPr>
+            <a:spLocks noGrp="1"/>
+          </p:cNvSpPr>
+          <p:nvPr>
+            <p:ph type="title"/>
+          </p:nvPr>
+        </p:nvSpPr>
+        <p:spPr/>
+        <p:txBody>
+          <a:bodyPr/>
+          <a:lstStyle/>
+          <a:p>
+            <a:r>
+              <a:rPr lang="en-US" dirty="0"/>
+              <a:t>Research Question</a:t>
+            </a:r>
+          </a:p>
+        </p:txBody>
+      </p:sp>
+      <p:sp>
+        <p:nvSpPr>
+          <p:cNvPr id="8" name="Content Placeholder 7">
+            <a:extLst>
+              <a:ext uri="{FF2B5EF4-FFF2-40B4-BE49-F238E27FC236}">
+                <a16:creationId xmlns:a16="http://schemas.microsoft.com/office/drawing/2014/main" id="{6CA60059-BB8F-9775-7EF9-0B288771173F}"/>
+              </a:ext>
+            </a:extLst>
+          </p:cNvPr>
+          <p:cNvSpPr>
+            <a:spLocks noGrp="1"/>
+          </p:cNvSpPr>
+          <p:nvPr>
+            <p:ph idx="1"/>
+          </p:nvPr>
+        </p:nvSpPr>
+        <p:spPr/>
+        <p:txBody>
+          <a:bodyPr/>
+          <a:lstStyle/>
+          <a:p>
+            <a:pPr marL="0" indent="0">
+              <a:buNone/>
+            </a:pPr>
+            <a:r>
+              <a:rPr lang="en-US" dirty="0"/>
+              <a:t>This should be a one sentence research question in the PICOT format.</a:t>
+            </a:r>
+          </a:p>
+        </p:txBody>
+      </p:sp>
+    </p:spTree>
+    <p:extLst>
+      <p:ext uri="{BB962C8B-B14F-4D97-AF65-F5344CB8AC3E}">
+        <p14:creationId xmlns:p14="http://schemas.microsoft.com/office/powerpoint/2010/main" val="1629339147"/>
+      </p:ext>
+    </p:extLst>
+  </p:cSld>
+  <p:clrMapOvr>
+    <a:masterClrMapping/>
+  </p:clrMapOvr>
+</p:sld>
+</file>
+
+<file path=ppt/slides/slide12.xml><?xml version="1.0" encoding="utf-8"?>
+<p:sld xmlns:a="http://schemas.openxmlformats.org/drawingml/2006/main" xmlns:r="http://schemas.openxmlformats.org/officeDocument/2006/relationships" xmlns:p="http://schemas.openxmlformats.org/presentationml/2006/main">
+  <p:cSld>
+    <p:spTree>
+      <p:nvGrpSpPr>
+        <p:cNvPr id="1" name="">
+          <a:extLst>
+            <a:ext uri="{FF2B5EF4-FFF2-40B4-BE49-F238E27FC236}">
+              <a16:creationId xmlns:a16="http://schemas.microsoft.com/office/drawing/2014/main" id="{87D2A850-1678-0E25-3326-AEA46F9B7429}"/>
+            </a:ext>
+          </a:extLst>
+        </p:cNvPr>
+        <p:cNvGrpSpPr/>
+        <p:nvPr/>
+      </p:nvGrpSpPr>
+      <p:grpSpPr>
+        <a:xfrm>
+          <a:off x="0" y="0"/>
+          <a:ext cx="0" cy="0"/>
+          <a:chOff x="0" y="0"/>
+          <a:chExt cx="0" cy="0"/>
+        </a:xfrm>
+      </p:grpSpPr>
+      <p:sp>
+        <p:nvSpPr>
+          <p:cNvPr id="2" name="Title 1">
+            <a:extLst>
+              <a:ext uri="{FF2B5EF4-FFF2-40B4-BE49-F238E27FC236}">
+                <a16:creationId xmlns:a16="http://schemas.microsoft.com/office/drawing/2014/main" id="{F636F979-E11A-255D-B619-8065D477C088}"/>
+              </a:ext>
+            </a:extLst>
+          </p:cNvPr>
+          <p:cNvSpPr>
+            <a:spLocks noGrp="1"/>
+          </p:cNvSpPr>
+          <p:nvPr>
+            <p:ph type="title"/>
+          </p:nvPr>
+        </p:nvSpPr>
+        <p:spPr/>
+        <p:txBody>
+          <a:bodyPr/>
+          <a:lstStyle/>
+          <a:p>
+            <a:r>
+              <a:rPr lang="en-US" dirty="0"/>
+              <a:t>Strategies to Compare</a:t>
+            </a:r>
+          </a:p>
+        </p:txBody>
+      </p:sp>
+      <p:sp>
+        <p:nvSpPr>
+          <p:cNvPr id="4" name="Content Placeholder 3">
+            <a:extLst>
+              <a:ext uri="{FF2B5EF4-FFF2-40B4-BE49-F238E27FC236}">
+                <a16:creationId xmlns:a16="http://schemas.microsoft.com/office/drawing/2014/main" id="{944CC9D5-B88E-EB37-6674-BCD2264F25C9}"/>
+              </a:ext>
+            </a:extLst>
+          </p:cNvPr>
+          <p:cNvSpPr>
+            <a:spLocks noGrp="1"/>
+          </p:cNvSpPr>
+          <p:nvPr>
+            <p:ph idx="1"/>
+          </p:nvPr>
+        </p:nvSpPr>
+        <p:spPr/>
+        <p:txBody>
+          <a:bodyPr/>
+          <a:lstStyle/>
+          <a:p>
+            <a:r>
+              <a:rPr lang="en-US" dirty="0"/>
+              <a:t>[Status quo]</a:t>
+            </a:r>
+          </a:p>
+          <a:p>
+            <a:r>
+              <a:rPr lang="en-US" dirty="0"/>
+              <a:t>[Strategies]</a:t>
+            </a:r>
+          </a:p>
+          <a:p>
+            <a:r>
+              <a:rPr lang="en-US" dirty="0"/>
+              <a:t>[1-2 sentences on how they vary]</a:t>
+            </a:r>
+          </a:p>
+          <a:p>
+            <a:pPr marL="0" indent="0">
+              <a:buNone/>
+            </a:pPr>
+            <a:endParaRPr lang="en-US" dirty="0"/>
+          </a:p>
+        </p:txBody>
+      </p:sp>
+    </p:spTree>
+    <p:extLst>
+      <p:ext uri="{BB962C8B-B14F-4D97-AF65-F5344CB8AC3E}">
+        <p14:creationId xmlns:p14="http://schemas.microsoft.com/office/powerpoint/2010/main" val="3636997760"/>
+      </p:ext>
+    </p:extLst>
+  </p:cSld>
+  <p:clrMapOvr>
+    <a:masterClrMapping/>
+  </p:clrMapOvr>
+</p:sld>
+</file>
+
+<file path=ppt/slides/slide2.xml><?xml version="1.0" encoding="utf-8"?>
+<p:sld xmlns:a="http://schemas.openxmlformats.org/drawingml/2006/main" xmlns:r="http://schemas.openxmlformats.org/officeDocument/2006/relationships" xmlns:p="http://schemas.openxmlformats.org/presentationml/2006/main">
+  <p:cSld>
+    <p:spTree>
+      <p:nvGrpSpPr>
+        <p:cNvPr id="1" name="">
+          <a:extLst>
+            <a:ext uri="{FF2B5EF4-FFF2-40B4-BE49-F238E27FC236}">
+              <a16:creationId xmlns:a16="http://schemas.microsoft.com/office/drawing/2014/main" id="{DEC94B34-3F81-8585-790E-1D26F6E2AD13}"/>
+            </a:ext>
+          </a:extLst>
+        </p:cNvPr>
+        <p:cNvGrpSpPr/>
+        <p:nvPr/>
+      </p:nvGrpSpPr>
+      <p:grpSpPr>
+        <a:xfrm>
+          <a:off x="0" y="0"/>
+          <a:ext cx="0" cy="0"/>
+          <a:chOff x="0" y="0"/>
+          <a:chExt cx="0" cy="0"/>
+        </a:xfrm>
+      </p:grpSpPr>
+      <p:sp>
+        <p:nvSpPr>
+          <p:cNvPr id="2" name="Title 1">
+            <a:extLst>
+              <a:ext uri="{FF2B5EF4-FFF2-40B4-BE49-F238E27FC236}">
+                <a16:creationId xmlns:a16="http://schemas.microsoft.com/office/drawing/2014/main" id="{42E49701-D48E-435F-93FE-B46BC6CC02C3}"/>
+              </a:ext>
+            </a:extLst>
+          </p:cNvPr>
+          <p:cNvSpPr>
+            <a:spLocks noGrp="1"/>
+          </p:cNvSpPr>
+          <p:nvPr>
+            <p:ph type="ctrTitle"/>
+          </p:nvPr>
+        </p:nvSpPr>
+        <p:spPr>
+          <a:xfrm>
+            <a:off x="1524000" y="1122363"/>
+            <a:ext cx="9569986" cy="2387600"/>
+          </a:xfrm>
+        </p:spPr>
+        <p:txBody>
+          <a:bodyPr>
+            <a:normAutofit fontScale="90000"/>
+          </a:bodyPr>
+          <a:lstStyle/>
+          <a:p>
+            <a:r>
+              <a:rPr lang="en-US" dirty="0"/>
+              <a:t>Cost Effectiveness of </a:t>
+            </a:r>
+            <a:br>
+              <a:rPr lang="en-US" dirty="0"/>
+            </a:br>
+            <a:r>
+              <a:rPr lang="en-US" dirty="0"/>
+              <a:t>Drug Prescribing for Medication  X</a:t>
+            </a:r>
+          </a:p>
+        </p:txBody>
+      </p:sp>
+      <p:sp>
+        <p:nvSpPr>
+          <p:cNvPr id="3" name="Subtitle 2">
+            <a:extLst>
+              <a:ext uri="{FF2B5EF4-FFF2-40B4-BE49-F238E27FC236}">
+                <a16:creationId xmlns:a16="http://schemas.microsoft.com/office/drawing/2014/main" id="{F1A27389-90EF-7DA0-6BFA-732FC3E0FA74}"/>
+              </a:ext>
+            </a:extLst>
+          </p:cNvPr>
+          <p:cNvSpPr>
+            <a:spLocks noGrp="1"/>
+          </p:cNvSpPr>
+          <p:nvPr>
+            <p:ph type="subTitle" idx="1"/>
+          </p:nvPr>
+        </p:nvSpPr>
+        <p:spPr/>
+        <p:txBody>
+          <a:bodyPr/>
+          <a:lstStyle/>
+          <a:p>
+            <a:r>
+              <a:rPr lang="en-US" dirty="0"/>
+              <a:t>Project as of  April 1, 2025</a:t>
+            </a:r>
+          </a:p>
+        </p:txBody>
+      </p:sp>
+      <p:sp>
+        <p:nvSpPr>
+          <p:cNvPr id="4" name="Subtitle 2">
+            <a:extLst>
+              <a:ext uri="{FF2B5EF4-FFF2-40B4-BE49-F238E27FC236}">
+                <a16:creationId xmlns:a16="http://schemas.microsoft.com/office/drawing/2014/main" id="{D18D822D-81A7-B9E0-BD20-EE219FA1A1FD}"/>
+              </a:ext>
+            </a:extLst>
+          </p:cNvPr>
+          <p:cNvSpPr txBox="1">
+            <a:spLocks/>
+          </p:cNvSpPr>
+          <p:nvPr/>
+        </p:nvSpPr>
+        <p:spPr>
+          <a:xfrm>
+            <a:off x="2832847" y="6407991"/>
+            <a:ext cx="9144000" cy="450009"/>
+          </a:xfrm>
+          <a:prstGeom prst="rect">
+            <a:avLst/>
+          </a:prstGeom>
+        </p:spPr>
+        <p:txBody>
+          <a:bodyPr vert="horz" lIns="91440" tIns="45720" rIns="91440" bIns="45720" rtlCol="0">
+            <a:normAutofit fontScale="92500"/>
+          </a:bodyPr>
+          <a:lstStyle>
+            <a:lvl1pPr marL="0" indent="0" algn="ctr" defTabSz="914400" rtl="0" eaLnBrk="1" latinLnBrk="0" hangingPunct="1">
+              <a:lnSpc>
+                <a:spcPct val="90000"/>
+              </a:lnSpc>
+              <a:spcBef>
+                <a:spcPts val="1000"/>
+              </a:spcBef>
+              <a:buFont typeface="Arial" panose="020B0604020202020204" pitchFamily="34" charset="0"/>
+              <a:buNone/>
+              <a:defRPr sz="2400" kern="1200">
+                <a:solidFill>
+                  <a:schemeClr val="tx1"/>
+                </a:solidFill>
+                <a:latin typeface="+mn-lt"/>
+                <a:ea typeface="+mn-ea"/>
+                <a:cs typeface="+mn-cs"/>
+              </a:defRPr>
+            </a:lvl1pPr>
+            <a:lvl2pPr marL="457200" indent="0" algn="ctr" defTabSz="914400" rtl="0" eaLnBrk="1" latinLnBrk="0" hangingPunct="1">
+              <a:lnSpc>
+                <a:spcPct val="90000"/>
+              </a:lnSpc>
+              <a:spcBef>
+                <a:spcPts val="500"/>
+              </a:spcBef>
+              <a:buFont typeface="Arial" panose="020B0604020202020204" pitchFamily="34" charset="0"/>
+              <a:buNone/>
+              <a:defRPr sz="2000" kern="1200">
+                <a:solidFill>
+                  <a:schemeClr val="tx1"/>
+                </a:solidFill>
+                <a:latin typeface="+mn-lt"/>
+                <a:ea typeface="+mn-ea"/>
+                <a:cs typeface="+mn-cs"/>
+              </a:defRPr>
+            </a:lvl2pPr>
+            <a:lvl3pPr marL="914400" indent="0" algn="ctr" defTabSz="914400" rtl="0" eaLnBrk="1" latinLnBrk="0" hangingPunct="1">
+              <a:lnSpc>
+                <a:spcPct val="90000"/>
+              </a:lnSpc>
+              <a:spcBef>
+                <a:spcPts val="500"/>
+              </a:spcBef>
+              <a:buFont typeface="Arial" panose="020B0604020202020204" pitchFamily="34" charset="0"/>
+              <a:buNone/>
+              <a:defRPr sz="1800" kern="1200">
+                <a:solidFill>
+                  <a:schemeClr val="tx1"/>
+                </a:solidFill>
+                <a:latin typeface="+mn-lt"/>
+                <a:ea typeface="+mn-ea"/>
+                <a:cs typeface="+mn-cs"/>
+              </a:defRPr>
+            </a:lvl3pPr>
+            <a:lvl4pPr marL="1371600" indent="0" algn="ctr" defTabSz="914400" rtl="0" eaLnBrk="1" latinLnBrk="0" hangingPunct="1">
+              <a:lnSpc>
+                <a:spcPct val="90000"/>
+              </a:lnSpc>
+              <a:spcBef>
+                <a:spcPts val="500"/>
+              </a:spcBef>
+              <a:buFont typeface="Arial" panose="020B0604020202020204" pitchFamily="34" charset="0"/>
+              <a:buNone/>
+              <a:defRPr sz="1600" kern="1200">
+                <a:solidFill>
+                  <a:schemeClr val="tx1"/>
+                </a:solidFill>
+                <a:latin typeface="+mn-lt"/>
+                <a:ea typeface="+mn-ea"/>
+                <a:cs typeface="+mn-cs"/>
+              </a:defRPr>
+            </a:lvl4pPr>
+            <a:lvl5pPr marL="1828800" indent="0" algn="ctr" defTabSz="914400" rtl="0" eaLnBrk="1" latinLnBrk="0" hangingPunct="1">
+              <a:lnSpc>
+                <a:spcPct val="90000"/>
+              </a:lnSpc>
+              <a:spcBef>
+                <a:spcPts val="500"/>
+              </a:spcBef>
+              <a:buFont typeface="Arial" panose="020B0604020202020204" pitchFamily="34" charset="0"/>
+              <a:buNone/>
+              <a:defRPr sz="1600" kern="1200">
+                <a:solidFill>
+                  <a:schemeClr val="tx1"/>
+                </a:solidFill>
+                <a:latin typeface="+mn-lt"/>
+                <a:ea typeface="+mn-ea"/>
+                <a:cs typeface="+mn-cs"/>
+              </a:defRPr>
+            </a:lvl5pPr>
+            <a:lvl6pPr marL="2286000" indent="0" algn="ctr" defTabSz="914400" rtl="0" eaLnBrk="1" latinLnBrk="0" hangingPunct="1">
+              <a:lnSpc>
+                <a:spcPct val="90000"/>
+              </a:lnSpc>
+              <a:spcBef>
+                <a:spcPts val="500"/>
+              </a:spcBef>
+              <a:buFont typeface="Arial" panose="020B0604020202020204" pitchFamily="34" charset="0"/>
+              <a:buNone/>
+              <a:defRPr sz="1600" kern="1200">
+                <a:solidFill>
+                  <a:schemeClr val="tx1"/>
+                </a:solidFill>
+                <a:latin typeface="+mn-lt"/>
+                <a:ea typeface="+mn-ea"/>
+                <a:cs typeface="+mn-cs"/>
+              </a:defRPr>
+            </a:lvl6pPr>
+            <a:lvl7pPr marL="2743200" indent="0" algn="ctr" defTabSz="914400" rtl="0" eaLnBrk="1" latinLnBrk="0" hangingPunct="1">
+              <a:lnSpc>
+                <a:spcPct val="90000"/>
+              </a:lnSpc>
+              <a:spcBef>
+                <a:spcPts val="500"/>
+              </a:spcBef>
+              <a:buFont typeface="Arial" panose="020B0604020202020204" pitchFamily="34" charset="0"/>
+              <a:buNone/>
+              <a:defRPr sz="1600" kern="1200">
+                <a:solidFill>
+                  <a:schemeClr val="tx1"/>
+                </a:solidFill>
+                <a:latin typeface="+mn-lt"/>
+                <a:ea typeface="+mn-ea"/>
+                <a:cs typeface="+mn-cs"/>
+              </a:defRPr>
+            </a:lvl7pPr>
+            <a:lvl8pPr marL="3200400" indent="0" algn="ctr" defTabSz="914400" rtl="0" eaLnBrk="1" latinLnBrk="0" hangingPunct="1">
+              <a:lnSpc>
+                <a:spcPct val="90000"/>
+              </a:lnSpc>
+              <a:spcBef>
+                <a:spcPts val="500"/>
+              </a:spcBef>
+              <a:buFont typeface="Arial" panose="020B0604020202020204" pitchFamily="34" charset="0"/>
+              <a:buNone/>
+              <a:defRPr sz="1600" kern="1200">
+                <a:solidFill>
+                  <a:schemeClr val="tx1"/>
+                </a:solidFill>
+                <a:latin typeface="+mn-lt"/>
+                <a:ea typeface="+mn-ea"/>
+                <a:cs typeface="+mn-cs"/>
+              </a:defRPr>
+            </a:lvl8pPr>
+            <a:lvl9pPr marL="3657600" indent="0" algn="ctr" defTabSz="914400" rtl="0" eaLnBrk="1" latinLnBrk="0" hangingPunct="1">
+              <a:lnSpc>
+                <a:spcPct val="90000"/>
+              </a:lnSpc>
+              <a:spcBef>
+                <a:spcPts val="500"/>
+              </a:spcBef>
+              <a:buFont typeface="Arial" panose="020B0604020202020204" pitchFamily="34" charset="0"/>
+              <a:buNone/>
+              <a:defRPr sz="1600" kern="1200">
+                <a:solidFill>
+                  <a:schemeClr val="tx1"/>
+                </a:solidFill>
+                <a:latin typeface="+mn-lt"/>
+                <a:ea typeface="+mn-ea"/>
+                <a:cs typeface="+mn-cs"/>
+              </a:defRPr>
+            </a:lvl9pPr>
+          </a:lstStyle>
+          <a:p>
+            <a:r>
+              <a:rPr lang="en-US" i="1" dirty="0"/>
+              <a:t>This is a sample, please excuse any inaccurate information or mistakes.</a:t>
+            </a:r>
+          </a:p>
+        </p:txBody>
+      </p:sp>
+    </p:spTree>
+    <p:extLst>
+      <p:ext uri="{BB962C8B-B14F-4D97-AF65-F5344CB8AC3E}">
+        <p14:creationId xmlns:p14="http://schemas.microsoft.com/office/powerpoint/2010/main" val="2308231345"/>
+      </p:ext>
+    </p:extLst>
+  </p:cSld>
+  <p:clrMapOvr>
+    <a:masterClrMapping/>
+  </p:clrMapOvr>
+</p:sld>
+</file>
+
+<file path=ppt/slides/slide3.xml><?xml version="1.0" encoding="utf-8"?>
+<p:sld xmlns:a="http://schemas.openxmlformats.org/drawingml/2006/main" xmlns:r="http://schemas.openxmlformats.org/officeDocument/2006/relationships" xmlns:p="http://schemas.openxmlformats.org/presentationml/2006/main">
+  <p:cSld>
+    <p:bg>
+      <p:bgPr>
+        <a:solidFill>
+          <a:schemeClr val="bg1"/>
+        </a:solidFill>
+        <a:effectLst/>
+      </p:bgPr>
+    </p:bg>
+    <p:spTree>
+      <p:nvGrpSpPr>
+        <p:cNvPr id="1" name=""/>
+        <p:cNvGrpSpPr/>
+        <p:nvPr/>
+      </p:nvGrpSpPr>
+      <p:grpSpPr>
+        <a:xfrm>
+          <a:off x="0" y="0"/>
+          <a:ext cx="0" cy="0"/>
+          <a:chOff x="0" y="0"/>
+          <a:chExt cx="0" cy="0"/>
+        </a:xfrm>
+      </p:grpSpPr>
+      <p:sp useBgFill="1">
+        <p:nvSpPr>
+          <p:cNvPr id="1045" name="Rectangle 1044">
+            <a:extLst>
+              <a:ext uri="{FF2B5EF4-FFF2-40B4-BE49-F238E27FC236}">
+                <a16:creationId xmlns:a16="http://schemas.microsoft.com/office/drawing/2014/main" id="{E817EB35-4D5C-493B-8459-98C99FD1667F}"/>
+              </a:ext>
+              <a:ext uri="{C183D7F6-B498-43B3-948B-1728B52AA6E4}">
+                <adec:decorative xmlns:adec="http://schemas.microsoft.com/office/drawing/2017/decorative" val="1"/>
+              </a:ext>
+            </a:extLst>
+          </p:cNvPr>
+          <p:cNvSpPr>
+            <a:spLocks noGrp="1" noRot="1" noChangeAspect="1" noMove="1" noResize="1" noEditPoints="1" noAdjustHandles="1" noChangeArrowheads="1" noChangeShapeType="1" noTextEdit="1"/>
+          </p:cNvSpPr>
+          <p:nvPr>
+            <p:extLst>
+              <p:ext uri="{386F3935-93C4-4BCD-93E2-E3B085C9AB24}">
+                <p16:designElem xmlns:p16="http://schemas.microsoft.com/office/powerpoint/2015/main" val="1"/>
+              </p:ext>
+            </p:extLst>
+          </p:nvPr>
+        </p:nvSpPr>
+        <p:spPr>
+          <a:xfrm>
+            <a:off x="0" y="0"/>
+            <a:ext cx="12188952" cy="6858000"/>
+          </a:xfrm>
+          <a:prstGeom prst="rect">
+            <a:avLst/>
+          </a:prstGeom>
+          <a:ln>
+            <a:noFill/>
+          </a:ln>
+        </p:spPr>
+        <p:style>
+          <a:lnRef idx="2">
+            <a:schemeClr val="accent1">
+              <a:shade val="50000"/>
+            </a:schemeClr>
+          </a:lnRef>
+          <a:fillRef idx="1">
+            <a:schemeClr val="accent1"/>
+          </a:fillRef>
+          <a:effectRef idx="0">
+            <a:schemeClr val="accent1"/>
+          </a:effectRef>
+          <a:fontRef idx="minor">
+            <a:schemeClr val="lt1"/>
+          </a:fontRef>
+        </p:style>
+        <p:txBody>
+          <a:bodyPr rtlCol="0" anchor="ctr"/>
+          <a:lstStyle/>
+          <a:p>
+            <a:pPr algn="ctr"/>
+            <a:endParaRPr lang="en-US"/>
+          </a:p>
+        </p:txBody>
+      </p:sp>
+      <p:sp>
+        <p:nvSpPr>
+          <p:cNvPr id="1047" name="Arc 1046">
+            <a:extLst>
+              <a:ext uri="{FF2B5EF4-FFF2-40B4-BE49-F238E27FC236}">
+                <a16:creationId xmlns:a16="http://schemas.microsoft.com/office/drawing/2014/main" id="{70BEB1E7-2F88-40BC-B73D-42E5B6F80BFC}"/>
+              </a:ext>
+              <a:ext uri="{C183D7F6-B498-43B3-948B-1728B52AA6E4}">
+                <adec:decorative xmlns:adec="http://schemas.microsoft.com/office/drawing/2017/decorative" val="1"/>
+              </a:ext>
+            </a:extLst>
+          </p:cNvPr>
+          <p:cNvSpPr>
+            <a:spLocks noGrp="1" noRot="1" noChangeAspect="1" noMove="1" noResize="1" noEditPoints="1" noAdjustHandles="1" noChangeArrowheads="1" noChangeShapeType="1" noTextEdit="1"/>
+          </p:cNvSpPr>
+          <p:nvPr>
+            <p:extLst>
+              <p:ext uri="{386F3935-93C4-4BCD-93E2-E3B085C9AB24}">
+                <p16:designElem xmlns:p16="http://schemas.microsoft.com/office/powerpoint/2015/main" val="1"/>
+              </p:ext>
+            </p:extLst>
+          </p:nvPr>
+        </p:nvSpPr>
+        <p:spPr>
+          <a:xfrm rot="5640269" flipV="1">
+            <a:off x="5586861" y="-553943"/>
+            <a:ext cx="3944178" cy="3944178"/>
+          </a:xfrm>
+          <a:prstGeom prst="arc">
+            <a:avLst>
+              <a:gd name="adj1" fmla="val 16200000"/>
+              <a:gd name="adj2" fmla="val 20093138"/>
+            </a:avLst>
+          </a:prstGeom>
+          <a:ln w="127000" cap="rnd">
+            <a:solidFill>
+              <a:schemeClr val="accent4"/>
+            </a:solidFill>
+            <a:prstDash val="dash"/>
+          </a:ln>
+        </p:spPr>
+        <p:style>
+          <a:lnRef idx="1">
+            <a:schemeClr val="accent1"/>
+          </a:lnRef>
+          <a:fillRef idx="0">
+            <a:schemeClr val="accent1"/>
+          </a:fillRef>
+          <a:effectRef idx="0">
+            <a:schemeClr val="accent1"/>
+          </a:effectRef>
+          <a:fontRef idx="minor">
+            <a:schemeClr val="tx1"/>
+          </a:fontRef>
+        </p:style>
+        <p:txBody>
+          <a:bodyPr rtlCol="0" anchor="ctr"/>
+          <a:lstStyle/>
+          <a:p>
+            <a:pPr algn="ctr"/>
+            <a:endParaRPr lang="en-US" dirty="0"/>
+          </a:p>
+        </p:txBody>
+      </p:sp>
+      <p:sp>
+        <p:nvSpPr>
+          <p:cNvPr id="5" name="Title 4">
+            <a:extLst>
+              <a:ext uri="{FF2B5EF4-FFF2-40B4-BE49-F238E27FC236}">
+                <a16:creationId xmlns:a16="http://schemas.microsoft.com/office/drawing/2014/main" id="{85C7A590-29F5-5B52-F34A-C2B313A8BC97}"/>
+              </a:ext>
+            </a:extLst>
+          </p:cNvPr>
+          <p:cNvSpPr>
+            <a:spLocks noGrp="1"/>
+          </p:cNvSpPr>
+          <p:nvPr>
+            <p:ph type="title"/>
+          </p:nvPr>
+        </p:nvSpPr>
+        <p:spPr>
+          <a:xfrm>
+            <a:off x="838201" y="345810"/>
+            <a:ext cx="4795164" cy="1325563"/>
+          </a:xfrm>
+        </p:spPr>
+        <p:txBody>
+          <a:bodyPr vert="horz" lIns="91440" tIns="45720" rIns="91440" bIns="45720" rtlCol="0" anchor="ctr">
+            <a:normAutofit/>
+          </a:bodyPr>
+          <a:lstStyle/>
+          <a:p>
+            <a:r>
+              <a:rPr lang="en-US" kern="1200" dirty="0">
+                <a:solidFill>
+                  <a:schemeClr val="tx1"/>
+                </a:solidFill>
+                <a:latin typeface="+mj-lt"/>
+                <a:ea typeface="+mj-ea"/>
+                <a:cs typeface="+mj-cs"/>
+              </a:rPr>
+              <a:t>About Us/Me</a:t>
+            </a:r>
+          </a:p>
+        </p:txBody>
+      </p:sp>
+      <p:sp>
+        <p:nvSpPr>
+          <p:cNvPr id="7" name="Content Placeholder 6">
+            <a:extLst>
+              <a:ext uri="{FF2B5EF4-FFF2-40B4-BE49-F238E27FC236}">
+                <a16:creationId xmlns:a16="http://schemas.microsoft.com/office/drawing/2014/main" id="{6FE02C89-F575-05AE-2C82-A95E855185EC}"/>
+              </a:ext>
+            </a:extLst>
+          </p:cNvPr>
+          <p:cNvSpPr>
+            <a:spLocks noGrp="1"/>
+          </p:cNvSpPr>
+          <p:nvPr>
+            <p:ph sz="half" idx="2"/>
+          </p:nvPr>
+        </p:nvSpPr>
+        <p:spPr>
+          <a:xfrm>
+            <a:off x="838201" y="1390389"/>
+            <a:ext cx="4795165" cy="4786574"/>
+          </a:xfrm>
+        </p:spPr>
+        <p:txBody>
+          <a:bodyPr vert="horz" lIns="91440" tIns="45720" rIns="91440" bIns="45720" rtlCol="0">
+            <a:normAutofit fontScale="92500" lnSpcReduction="20000"/>
+          </a:bodyPr>
+          <a:lstStyle/>
+          <a:p>
+            <a:pPr marL="0" indent="0">
+              <a:buNone/>
+            </a:pPr>
+            <a:r>
+              <a:rPr lang="en-US" sz="2400" b="1" dirty="0"/>
+              <a:t>Dog </a:t>
+            </a:r>
+            <a:r>
+              <a:rPr lang="en-US" sz="2400" b="1" dirty="0" err="1"/>
+              <a:t>McScruff</a:t>
+            </a:r>
+            <a:r>
+              <a:rPr lang="en-US" sz="2400" b="1" dirty="0"/>
+              <a:t> &amp; Cat </a:t>
+            </a:r>
+            <a:r>
+              <a:rPr lang="en-US" sz="2400" b="1" dirty="0" err="1"/>
+              <a:t>LaFluff</a:t>
+            </a:r>
+            <a:endParaRPr lang="en-US" sz="2400" b="1" dirty="0"/>
+          </a:p>
+          <a:p>
+            <a:pPr marL="0" indent="0">
+              <a:buNone/>
+            </a:pPr>
+            <a:r>
+              <a:rPr lang="en-US" sz="2400" dirty="0"/>
+              <a:t>from The United States of America</a:t>
+            </a:r>
+          </a:p>
+          <a:p>
+            <a:pPr marL="0"/>
+            <a:endParaRPr lang="en-US" sz="2400" dirty="0"/>
+          </a:p>
+          <a:p>
+            <a:pPr marL="0" indent="0">
+              <a:buNone/>
+            </a:pPr>
+            <a:r>
+              <a:rPr lang="en-US" sz="2400" dirty="0"/>
+              <a:t>Dog: </a:t>
+            </a:r>
+          </a:p>
+          <a:p>
+            <a:r>
+              <a:rPr lang="en-US" sz="2400" dirty="0"/>
+              <a:t>Director of Health Economics Research at Vanderbilt University</a:t>
+            </a:r>
+          </a:p>
+          <a:p>
+            <a:r>
+              <a:rPr lang="en-US" sz="2400" dirty="0"/>
+              <a:t>Areas of Interest: Prescription drugs, and Health Care Costs</a:t>
+            </a:r>
+          </a:p>
+          <a:p>
+            <a:endParaRPr lang="en-US" sz="2400" dirty="0"/>
+          </a:p>
+          <a:p>
+            <a:pPr marL="0" indent="0">
+              <a:buNone/>
+            </a:pPr>
+            <a:r>
+              <a:rPr lang="en-US" sz="2400" dirty="0"/>
+              <a:t>Cat:</a:t>
+            </a:r>
+          </a:p>
+          <a:p>
+            <a:r>
+              <a:rPr lang="en-US" sz="2400" dirty="0"/>
+              <a:t>Health resources specialist at the United States Department of Health</a:t>
+            </a:r>
+          </a:p>
+          <a:p>
+            <a:r>
+              <a:rPr lang="en-US" sz="2400" dirty="0"/>
+              <a:t>Areas of Interest: Cancer medication, and community health</a:t>
+            </a:r>
+          </a:p>
+        </p:txBody>
+      </p:sp>
+      <p:pic>
+        <p:nvPicPr>
+          <p:cNvPr id="1032" name="Picture 8" descr="Ragdoll Kitten Red Toy Car On Stock Photo 50587753 | Shutterstock">
+            <a:extLst>
+              <a:ext uri="{FF2B5EF4-FFF2-40B4-BE49-F238E27FC236}">
+                <a16:creationId xmlns:a16="http://schemas.microsoft.com/office/drawing/2014/main" id="{19A2897B-675B-15BE-3253-28475682EFC2}"/>
+              </a:ext>
+            </a:extLst>
+          </p:cNvPr>
+          <p:cNvPicPr>
+            <a:picLocks noChangeAspect="1" noChangeArrowheads="1"/>
+          </p:cNvPicPr>
+          <p:nvPr/>
+        </p:nvPicPr>
+        <p:blipFill rotWithShape="1">
+          <a:blip r:embed="rId2">
+            <a:extLst>
+              <a:ext uri="{28A0092B-C50C-407E-A947-70E740481C1C}">
+                <a14:useLocalDpi xmlns:a14="http://schemas.microsoft.com/office/drawing/2010/main" val="0"/>
+              </a:ext>
+            </a:extLst>
+          </a:blip>
+          <a:srcRect l="3248" t="-6195" r="14141" b="6192"/>
+          <a:stretch>
+            <a:fillRect/>
+          </a:stretch>
+        </p:blipFill>
+        <p:spPr bwMode="auto">
+          <a:xfrm>
+            <a:off x="5988784" y="-180000"/>
+            <a:ext cx="3343282" cy="2905636"/>
+          </a:xfrm>
+          <a:custGeom>
+            <a:avLst/>
+            <a:gdLst/>
+            <a:ahLst/>
+            <a:cxnLst/>
+            <a:rect l="l" t="t" r="r" b="b"/>
+            <a:pathLst>
+              <a:path w="3343282" h="2905646">
+                <a:moveTo>
+                  <a:pt x="546801" y="0"/>
+                </a:moveTo>
+                <a:lnTo>
+                  <a:pt x="2796481" y="0"/>
+                </a:lnTo>
+                <a:lnTo>
+                  <a:pt x="2853670" y="51976"/>
+                </a:lnTo>
+                <a:cubicBezTo>
+                  <a:pt x="3156177" y="354484"/>
+                  <a:pt x="3343282" y="772394"/>
+                  <a:pt x="3343282" y="1234005"/>
+                </a:cubicBezTo>
+                <a:cubicBezTo>
+                  <a:pt x="3343282" y="2157227"/>
+                  <a:pt x="2594863" y="2905646"/>
+                  <a:pt x="1671641" y="2905646"/>
+                </a:cubicBezTo>
+                <a:cubicBezTo>
+                  <a:pt x="748420" y="2905646"/>
+                  <a:pt x="0" y="2157227"/>
+                  <a:pt x="0" y="1234005"/>
+                </a:cubicBezTo>
+                <a:cubicBezTo>
+                  <a:pt x="0" y="772394"/>
+                  <a:pt x="187105" y="354484"/>
+                  <a:pt x="489613" y="51976"/>
+                </a:cubicBezTo>
+                <a:close/>
+              </a:path>
+            </a:pathLst>
+          </a:custGeom>
+          <a:noFill/>
+          <a:extLst>
+            <a:ext uri="{909E8E84-426E-40DD-AFC4-6F175D3DCCD1}">
+              <a14:hiddenFill xmlns:a14="http://schemas.microsoft.com/office/drawing/2010/main">
+                <a:solidFill>
+                  <a:srgbClr val="FFFFFF"/>
+                </a:solidFill>
+              </a14:hiddenFill>
+            </a:ext>
+          </a:extLst>
+        </p:spPr>
+      </p:pic>
+      <p:pic>
+        <p:nvPicPr>
+          <p:cNvPr id="1040" name="Picture 16" descr="250+ Dog Soccer Ball Jack Russell Terrier Stock Photos, Pictures &amp;  Royalty-Free Images - iStock">
+            <a:extLst>
+              <a:ext uri="{FF2B5EF4-FFF2-40B4-BE49-F238E27FC236}">
+                <a16:creationId xmlns:a16="http://schemas.microsoft.com/office/drawing/2014/main" id="{123568D1-662F-D4FE-6E16-CCF14490FFA2}"/>
+              </a:ext>
+            </a:extLst>
+          </p:cNvPr>
+          <p:cNvPicPr>
+            <a:picLocks noChangeAspect="1" noChangeArrowheads="1"/>
+          </p:cNvPicPr>
+          <p:nvPr/>
+        </p:nvPicPr>
+        <p:blipFill rotWithShape="1">
+          <a:blip r:embed="rId3">
+            <a:extLst>
+              <a:ext uri="{28A0092B-C50C-407E-A947-70E740481C1C}">
+                <a14:useLocalDpi xmlns:a14="http://schemas.microsoft.com/office/drawing/2010/main" val="0"/>
+              </a:ext>
+            </a:extLst>
+          </a:blip>
+          <a:srcRect l="5006" r="22339" b="-3"/>
+          <a:stretch>
+            <a:fillRect/>
+          </a:stretch>
+        </p:blipFill>
+        <p:spPr bwMode="auto">
+          <a:xfrm>
+            <a:off x="6172241" y="3154859"/>
+            <a:ext cx="4030579" cy="3703141"/>
+          </a:xfrm>
+          <a:custGeom>
+            <a:avLst/>
+            <a:gdLst/>
+            <a:ahLst/>
+            <a:cxnLst/>
+            <a:rect l="l" t="t" r="r" b="b"/>
+            <a:pathLst>
+              <a:path w="4030579" h="3703141">
+                <a:moveTo>
+                  <a:pt x="2015289" y="0"/>
+                </a:moveTo>
+                <a:cubicBezTo>
+                  <a:pt x="3128303" y="0"/>
+                  <a:pt x="4030579" y="902277"/>
+                  <a:pt x="4030579" y="2015290"/>
+                </a:cubicBezTo>
+                <a:cubicBezTo>
+                  <a:pt x="4030579" y="2710923"/>
+                  <a:pt x="3678127" y="3324237"/>
+                  <a:pt x="3142057" y="3686399"/>
+                </a:cubicBezTo>
+                <a:lnTo>
+                  <a:pt x="3114499" y="3703141"/>
+                </a:lnTo>
+                <a:lnTo>
+                  <a:pt x="916080" y="3703141"/>
+                </a:lnTo>
+                <a:lnTo>
+                  <a:pt x="888522" y="3686399"/>
+                </a:lnTo>
+                <a:cubicBezTo>
+                  <a:pt x="352452" y="3324237"/>
+                  <a:pt x="0" y="2710923"/>
+                  <a:pt x="0" y="2015290"/>
+                </a:cubicBezTo>
+                <a:cubicBezTo>
+                  <a:pt x="0" y="902277"/>
+                  <a:pt x="902277" y="0"/>
+                  <a:pt x="2015289" y="0"/>
+                </a:cubicBezTo>
+                <a:close/>
+              </a:path>
+            </a:pathLst>
+          </a:custGeom>
+          <a:noFill/>
+          <a:extLst>
+            <a:ext uri="{909E8E84-426E-40DD-AFC4-6F175D3DCCD1}">
+              <a14:hiddenFill xmlns:a14="http://schemas.microsoft.com/office/drawing/2010/main">
+                <a:solidFill>
+                  <a:srgbClr val="FFFFFF"/>
+                </a:solidFill>
+              </a14:hiddenFill>
+            </a:ext>
+          </a:extLst>
+        </p:spPr>
+      </p:pic>
+      <p:pic>
+        <p:nvPicPr>
+          <p:cNvPr id="1034" name="Picture 10" descr="430+ Work From Home Funny Dog Stock Photos, Pictures &amp; Royalty-Free Images  - iStock">
+            <a:extLst>
+              <a:ext uri="{FF2B5EF4-FFF2-40B4-BE49-F238E27FC236}">
+                <a16:creationId xmlns:a16="http://schemas.microsoft.com/office/drawing/2014/main" id="{6BA49772-8B1A-A742-C3EB-36319AB8AC7C}"/>
+              </a:ext>
+            </a:extLst>
+          </p:cNvPr>
+          <p:cNvPicPr>
+            <a:picLocks noChangeAspect="1" noChangeArrowheads="1"/>
+          </p:cNvPicPr>
+          <p:nvPr/>
+        </p:nvPicPr>
+        <p:blipFill rotWithShape="1">
+          <a:blip r:embed="rId4">
+            <a:extLst>
+              <a:ext uri="{28A0092B-C50C-407E-A947-70E740481C1C}">
+                <a14:useLocalDpi xmlns:a14="http://schemas.microsoft.com/office/drawing/2010/main" val="0"/>
+              </a:ext>
+            </a:extLst>
+          </a:blip>
+          <a:srcRect l="33553" r="20351" b="2"/>
+          <a:stretch>
+            <a:fillRect/>
+          </a:stretch>
+        </p:blipFill>
+        <p:spPr bwMode="auto">
+          <a:xfrm>
+            <a:off x="9523005" y="10"/>
+            <a:ext cx="2668994" cy="3864758"/>
+          </a:xfrm>
+          <a:custGeom>
+            <a:avLst/>
+            <a:gdLst/>
+            <a:ahLst/>
+            <a:cxnLst/>
+            <a:rect l="l" t="t" r="r" b="b"/>
+            <a:pathLst>
+              <a:path w="2668994" h="3864768">
+                <a:moveTo>
+                  <a:pt x="1215406" y="0"/>
+                </a:moveTo>
+                <a:lnTo>
+                  <a:pt x="2668994" y="0"/>
+                </a:lnTo>
+                <a:lnTo>
+                  <a:pt x="2668994" y="3754247"/>
+                </a:lnTo>
+                <a:lnTo>
+                  <a:pt x="2614574" y="3774165"/>
+                </a:lnTo>
+                <a:cubicBezTo>
+                  <a:pt x="2425260" y="3833048"/>
+                  <a:pt x="2223979" y="3864768"/>
+                  <a:pt x="2015289" y="3864768"/>
+                </a:cubicBezTo>
+                <a:cubicBezTo>
+                  <a:pt x="902276" y="3864768"/>
+                  <a:pt x="0" y="2962492"/>
+                  <a:pt x="0" y="1849479"/>
+                </a:cubicBezTo>
+                <a:cubicBezTo>
+                  <a:pt x="0" y="1084283"/>
+                  <a:pt x="426467" y="418692"/>
+                  <a:pt x="1054683" y="77425"/>
+                </a:cubicBezTo>
+                <a:close/>
+              </a:path>
+            </a:pathLst>
+          </a:custGeom>
+          <a:noFill/>
+          <a:extLst>
+            <a:ext uri="{909E8E84-426E-40DD-AFC4-6F175D3DCCD1}">
+              <a14:hiddenFill xmlns:a14="http://schemas.microsoft.com/office/drawing/2010/main">
+                <a:solidFill>
+                  <a:srgbClr val="FFFFFF"/>
+                </a:solidFill>
+              </a14:hiddenFill>
+            </a:ext>
+          </a:extLst>
+        </p:spPr>
+      </p:pic>
+      <p:pic>
+        <p:nvPicPr>
+          <p:cNvPr id="1026" name="Picture 2" descr="ragdoll kittens for sale seal bicolor">
+            <a:extLst>
+              <a:ext uri="{FF2B5EF4-FFF2-40B4-BE49-F238E27FC236}">
+                <a16:creationId xmlns:a16="http://schemas.microsoft.com/office/drawing/2014/main" id="{BF20AF6C-C76B-07DD-F5F7-83781603DED8}"/>
+              </a:ext>
+            </a:extLst>
+          </p:cNvPr>
+          <p:cNvPicPr>
+            <a:picLocks noChangeAspect="1" noChangeArrowheads="1"/>
+          </p:cNvPicPr>
+          <p:nvPr/>
+        </p:nvPicPr>
+        <p:blipFill>
+          <a:blip r:embed="rId5">
+            <a:extLst>
+              <a:ext uri="{28A0092B-C50C-407E-A947-70E740481C1C}">
+                <a14:useLocalDpi xmlns:a14="http://schemas.microsoft.com/office/drawing/2010/main" val="0"/>
+              </a:ext>
+            </a:extLst>
+          </a:blip>
+          <a:srcRect l="14868" r="22552" b="3"/>
+          <a:stretch>
+            <a:fillRect/>
+          </a:stretch>
+        </p:blipFill>
+        <p:spPr bwMode="auto">
+          <a:xfrm>
+            <a:off x="10404210" y="4001294"/>
+            <a:ext cx="1787791" cy="2856706"/>
+          </a:xfrm>
+          <a:custGeom>
+            <a:avLst/>
+            <a:gdLst/>
+            <a:ahLst/>
+            <a:cxnLst/>
+            <a:rect l="l" t="t" r="r" b="b"/>
+            <a:pathLst>
+              <a:path w="1787791" h="2856706">
+                <a:moveTo>
+                  <a:pt x="1531941" y="0"/>
+                </a:moveTo>
+                <a:cubicBezTo>
+                  <a:pt x="1584820" y="0"/>
+                  <a:pt x="1637074" y="2679"/>
+                  <a:pt x="1688573" y="7909"/>
+                </a:cubicBezTo>
+                <a:lnTo>
+                  <a:pt x="1787791" y="23052"/>
+                </a:lnTo>
+                <a:lnTo>
+                  <a:pt x="1787791" y="2856706"/>
+                </a:lnTo>
+                <a:lnTo>
+                  <a:pt x="765053" y="2856706"/>
+                </a:lnTo>
+                <a:lnTo>
+                  <a:pt x="675418" y="2802252"/>
+                </a:lnTo>
+                <a:cubicBezTo>
+                  <a:pt x="267919" y="2526951"/>
+                  <a:pt x="0" y="2060735"/>
+                  <a:pt x="0" y="1531942"/>
+                </a:cubicBezTo>
+                <a:cubicBezTo>
+                  <a:pt x="0" y="685873"/>
+                  <a:pt x="685873" y="0"/>
+                  <a:pt x="1531941" y="0"/>
+                </a:cubicBezTo>
+                <a:close/>
+              </a:path>
+            </a:pathLst>
+          </a:custGeom>
+          <a:noFill/>
+          <a:extLst>
+            <a:ext uri="{909E8E84-426E-40DD-AFC4-6F175D3DCCD1}">
+              <a14:hiddenFill xmlns:a14="http://schemas.microsoft.com/office/drawing/2010/main">
+                <a:solidFill>
+                  <a:srgbClr val="FFFFFF"/>
+                </a:solidFill>
+              </a14:hiddenFill>
+            </a:ext>
+          </a:extLst>
+        </p:spPr>
+      </p:pic>
+    </p:spTree>
+    <p:extLst>
+      <p:ext uri="{BB962C8B-B14F-4D97-AF65-F5344CB8AC3E}">
+        <p14:creationId xmlns:p14="http://schemas.microsoft.com/office/powerpoint/2010/main" val="1296911313"/>
+      </p:ext>
+    </p:extLst>
+  </p:cSld>
+  <p:clrMapOvr>
+    <a:masterClrMapping/>
+  </p:clrMapOvr>
+</p:sld>
+</file>
+
+<file path=ppt/slides/slide4.xml><?xml version="1.0" encoding="utf-8"?>
+<p:sld xmlns:a="http://schemas.openxmlformats.org/drawingml/2006/main" xmlns:r="http://schemas.openxmlformats.org/officeDocument/2006/relationships" xmlns:p="http://schemas.openxmlformats.org/presentationml/2006/main">
+  <p:cSld>
+    <p:spTree>
+      <p:nvGrpSpPr>
+        <p:cNvPr id="1" name=""/>
+        <p:cNvGrpSpPr/>
+        <p:nvPr/>
+      </p:nvGrpSpPr>
+      <p:grpSpPr>
+        <a:xfrm>
+          <a:off x="0" y="0"/>
+          <a:ext cx="0" cy="0"/>
+          <a:chOff x="0" y="0"/>
+          <a:chExt cx="0" cy="0"/>
+        </a:xfrm>
+      </p:grpSpPr>
+      <p:sp>
+        <p:nvSpPr>
+          <p:cNvPr id="2" name="Title 1">
+            <a:extLst>
+              <a:ext uri="{FF2B5EF4-FFF2-40B4-BE49-F238E27FC236}">
+                <a16:creationId xmlns:a16="http://schemas.microsoft.com/office/drawing/2014/main" id="{6D4B9C87-93D0-9CF2-5979-AC8ABE5F97DD}"/>
+              </a:ext>
+            </a:extLst>
+          </p:cNvPr>
+          <p:cNvSpPr>
+            <a:spLocks noGrp="1"/>
+          </p:cNvSpPr>
+          <p:nvPr>
+            <p:ph type="title"/>
+          </p:nvPr>
+        </p:nvSpPr>
+        <p:spPr/>
+        <p:txBody>
+          <a:bodyPr/>
+          <a:lstStyle/>
+          <a:p>
+            <a:r>
+              <a:rPr lang="en-US" dirty="0"/>
+              <a:t>Introduction</a:t>
+            </a:r>
+          </a:p>
+        </p:txBody>
+      </p:sp>
+      <p:sp>
+        <p:nvSpPr>
+          <p:cNvPr id="5" name="Text Placeholder 4">
+            <a:extLst>
+              <a:ext uri="{FF2B5EF4-FFF2-40B4-BE49-F238E27FC236}">
+                <a16:creationId xmlns:a16="http://schemas.microsoft.com/office/drawing/2014/main" id="{7C6AB1CD-5176-DAA9-A27D-B93EC0C3AF81}"/>
+              </a:ext>
+            </a:extLst>
+          </p:cNvPr>
+          <p:cNvSpPr>
+            <a:spLocks noGrp="1"/>
+          </p:cNvSpPr>
+          <p:nvPr>
+            <p:ph type="body" idx="1"/>
+          </p:nvPr>
+        </p:nvSpPr>
+        <p:spPr/>
+        <p:txBody>
+          <a:bodyPr/>
+          <a:lstStyle/>
+          <a:p>
+            <a:r>
+              <a:rPr lang="en-US" dirty="0"/>
+              <a:t>Disease Overview</a:t>
+            </a:r>
+          </a:p>
+        </p:txBody>
+      </p:sp>
+      <p:sp>
+        <p:nvSpPr>
+          <p:cNvPr id="3" name="Content Placeholder 2">
+            <a:extLst>
+              <a:ext uri="{FF2B5EF4-FFF2-40B4-BE49-F238E27FC236}">
+                <a16:creationId xmlns:a16="http://schemas.microsoft.com/office/drawing/2014/main" id="{AC8405D0-A0AD-44F3-C2EB-FC1828519072}"/>
+              </a:ext>
+            </a:extLst>
+          </p:cNvPr>
+          <p:cNvSpPr>
+            <a:spLocks noGrp="1"/>
+          </p:cNvSpPr>
+          <p:nvPr>
+            <p:ph sz="half" idx="2"/>
+          </p:nvPr>
+        </p:nvSpPr>
+        <p:spPr>
+          <a:xfrm>
+            <a:off x="839788" y="2505075"/>
+            <a:ext cx="4960377" cy="3684588"/>
+          </a:xfrm>
+        </p:spPr>
+        <p:txBody>
+          <a:bodyPr/>
+          <a:lstStyle/>
+          <a:p>
+            <a:r>
+              <a:rPr lang="en-US" dirty="0"/>
+              <a:t>Disease A</a:t>
+            </a:r>
+          </a:p>
+          <a:p>
+            <a:pPr lvl="1"/>
+            <a:r>
+              <a:rPr lang="en-US" dirty="0"/>
+              <a:t>Needs treatment by medication</a:t>
+            </a:r>
+          </a:p>
+          <a:p>
+            <a:pPr lvl="1"/>
+            <a:r>
+              <a:rPr lang="en-US" dirty="0"/>
+              <a:t>High risk of death without medication</a:t>
+            </a:r>
+          </a:p>
+          <a:p>
+            <a:pPr lvl="1"/>
+            <a:r>
+              <a:rPr lang="en-US" dirty="0"/>
+              <a:t>Not contagious</a:t>
+            </a:r>
+          </a:p>
+        </p:txBody>
+      </p:sp>
+      <p:sp>
+        <p:nvSpPr>
+          <p:cNvPr id="6" name="Text Placeholder 5">
+            <a:extLst>
+              <a:ext uri="{FF2B5EF4-FFF2-40B4-BE49-F238E27FC236}">
+                <a16:creationId xmlns:a16="http://schemas.microsoft.com/office/drawing/2014/main" id="{0E76D70D-2D80-D440-546D-9FEC71549403}"/>
+              </a:ext>
+            </a:extLst>
+          </p:cNvPr>
+          <p:cNvSpPr>
+            <a:spLocks noGrp="1"/>
+          </p:cNvSpPr>
+          <p:nvPr>
+            <p:ph type="body" sz="quarter" idx="3"/>
+          </p:nvPr>
+        </p:nvSpPr>
+        <p:spPr/>
+        <p:txBody>
+          <a:bodyPr/>
+          <a:lstStyle/>
+          <a:p>
+            <a:r>
+              <a:rPr lang="en-US" dirty="0"/>
+              <a:t>Importance to Country</a:t>
+            </a:r>
+          </a:p>
+        </p:txBody>
+      </p:sp>
+      <p:sp>
+        <p:nvSpPr>
+          <p:cNvPr id="7" name="Content Placeholder 6">
+            <a:extLst>
+              <a:ext uri="{FF2B5EF4-FFF2-40B4-BE49-F238E27FC236}">
+                <a16:creationId xmlns:a16="http://schemas.microsoft.com/office/drawing/2014/main" id="{1EEFB142-11E3-0814-D3D9-D75281ADDDCD}"/>
+              </a:ext>
+            </a:extLst>
+          </p:cNvPr>
+          <p:cNvSpPr>
+            <a:spLocks noGrp="1"/>
+          </p:cNvSpPr>
+          <p:nvPr>
+            <p:ph sz="quarter" idx="4"/>
+          </p:nvPr>
+        </p:nvSpPr>
+        <p:spPr/>
+        <p:txBody>
+          <a:bodyPr/>
+          <a:lstStyle/>
+          <a:p>
+            <a:r>
+              <a:rPr lang="en-US" dirty="0"/>
+              <a:t>Disease A is common cause of death </a:t>
+            </a:r>
+          </a:p>
+          <a:p>
+            <a:r>
+              <a:rPr lang="en-US" dirty="0"/>
+              <a:t>Medication is high cost so figuring out the best balance for prescribing will save lives and money.</a:t>
+            </a:r>
+          </a:p>
+          <a:p>
+            <a:endParaRPr lang="en-US" dirty="0"/>
+          </a:p>
+        </p:txBody>
+      </p:sp>
+    </p:spTree>
+    <p:extLst>
+      <p:ext uri="{BB962C8B-B14F-4D97-AF65-F5344CB8AC3E}">
+        <p14:creationId xmlns:p14="http://schemas.microsoft.com/office/powerpoint/2010/main" val="1587268627"/>
+      </p:ext>
+    </p:extLst>
+  </p:cSld>
+  <p:clrMapOvr>
+    <a:masterClrMapping/>
+  </p:clrMapOvr>
+</p:sld>
+</file>
+
+<file path=ppt/slides/slide5.xml><?xml version="1.0" encoding="utf-8"?>
+<p:sld xmlns:a="http://schemas.openxmlformats.org/drawingml/2006/main" xmlns:r="http://schemas.openxmlformats.org/officeDocument/2006/relationships" xmlns:p="http://schemas.openxmlformats.org/presentationml/2006/main">
+  <p:cSld>
+    <p:spTree>
+      <p:nvGrpSpPr>
+        <p:cNvPr id="1" name=""/>
+        <p:cNvGrpSpPr/>
+        <p:nvPr/>
+      </p:nvGrpSpPr>
+      <p:grpSpPr>
+        <a:xfrm>
+          <a:off x="0" y="0"/>
+          <a:ext cx="0" cy="0"/>
+          <a:chOff x="0" y="0"/>
+          <a:chExt cx="0" cy="0"/>
+        </a:xfrm>
+      </p:grpSpPr>
+      <p:sp>
+        <p:nvSpPr>
+          <p:cNvPr id="7" name="Title 6">
+            <a:extLst>
+              <a:ext uri="{FF2B5EF4-FFF2-40B4-BE49-F238E27FC236}">
+                <a16:creationId xmlns:a16="http://schemas.microsoft.com/office/drawing/2014/main" id="{394091DA-0DFF-4FAE-502A-4A6E597BF9DD}"/>
+              </a:ext>
+            </a:extLst>
+          </p:cNvPr>
+          <p:cNvSpPr>
+            <a:spLocks noGrp="1"/>
+          </p:cNvSpPr>
+          <p:nvPr>
+            <p:ph type="title"/>
+          </p:nvPr>
+        </p:nvSpPr>
+        <p:spPr/>
+        <p:txBody>
+          <a:bodyPr/>
+          <a:lstStyle/>
+          <a:p>
+            <a:r>
+              <a:rPr lang="en-US" dirty="0"/>
+              <a:t>Research Question</a:t>
+            </a:r>
+          </a:p>
+        </p:txBody>
+      </p:sp>
+      <p:sp>
+        <p:nvSpPr>
+          <p:cNvPr id="8" name="Content Placeholder 7">
+            <a:extLst>
+              <a:ext uri="{FF2B5EF4-FFF2-40B4-BE49-F238E27FC236}">
+                <a16:creationId xmlns:a16="http://schemas.microsoft.com/office/drawing/2014/main" id="{6C53B6AB-2ACE-24DC-9598-171525C96BA9}"/>
+              </a:ext>
+            </a:extLst>
+          </p:cNvPr>
+          <p:cNvSpPr>
+            <a:spLocks noGrp="1"/>
+          </p:cNvSpPr>
+          <p:nvPr>
+            <p:ph idx="1"/>
+          </p:nvPr>
+        </p:nvSpPr>
+        <p:spPr/>
+        <p:txBody>
+          <a:bodyPr/>
+          <a:lstStyle/>
+          <a:p>
+            <a:pPr marL="0" indent="0">
+              <a:buNone/>
+            </a:pPr>
+            <a:r>
+              <a:rPr lang="en-US" dirty="0"/>
+              <a:t>In hospitalized patients requiring Drug X for disease A, does prescribing the drug at one week comparted to 24 hours compared to 72 hours result in greater cost-effectiveness (cost per death adverted) over the hospitalization period?</a:t>
+            </a:r>
+          </a:p>
+        </p:txBody>
+      </p:sp>
+    </p:spTree>
+    <p:extLst>
+      <p:ext uri="{BB962C8B-B14F-4D97-AF65-F5344CB8AC3E}">
+        <p14:creationId xmlns:p14="http://schemas.microsoft.com/office/powerpoint/2010/main" val="3197325976"/>
+      </p:ext>
+    </p:extLst>
+  </p:cSld>
+  <p:clrMapOvr>
+    <a:masterClrMapping/>
+  </p:clrMapOvr>
+</p:sld>
+</file>
+
+<file path=ppt/slides/slide6.xml><?xml version="1.0" encoding="utf-8"?>
+<p:sld xmlns:a="http://schemas.openxmlformats.org/drawingml/2006/main" xmlns:r="http://schemas.openxmlformats.org/officeDocument/2006/relationships" xmlns:p="http://schemas.openxmlformats.org/presentationml/2006/main">
+  <p:cSld>
+    <p:spTree>
+      <p:nvGrpSpPr>
+        <p:cNvPr id="1" name=""/>
+        <p:cNvGrpSpPr/>
+        <p:nvPr/>
+      </p:nvGrpSpPr>
+      <p:grpSpPr>
+        <a:xfrm>
+          <a:off x="0" y="0"/>
+          <a:ext cx="0" cy="0"/>
+          <a:chOff x="0" y="0"/>
+          <a:chExt cx="0" cy="0"/>
+        </a:xfrm>
+      </p:grpSpPr>
+      <p:sp>
+        <p:nvSpPr>
+          <p:cNvPr id="2" name="Title 1">
+            <a:extLst>
+              <a:ext uri="{FF2B5EF4-FFF2-40B4-BE49-F238E27FC236}">
+                <a16:creationId xmlns:a16="http://schemas.microsoft.com/office/drawing/2014/main" id="{84771C47-9E57-231D-C25C-66C2E99FBF88}"/>
+              </a:ext>
+            </a:extLst>
+          </p:cNvPr>
+          <p:cNvSpPr>
+            <a:spLocks noGrp="1"/>
+          </p:cNvSpPr>
+          <p:nvPr>
+            <p:ph type="title"/>
+          </p:nvPr>
+        </p:nvSpPr>
+        <p:spPr/>
+        <p:txBody>
+          <a:bodyPr/>
+          <a:lstStyle/>
+          <a:p>
+            <a:r>
+              <a:rPr lang="en-US" dirty="0"/>
+              <a:t>Strategies to Compare</a:t>
+            </a:r>
+          </a:p>
+        </p:txBody>
+      </p:sp>
+      <p:sp>
+        <p:nvSpPr>
+          <p:cNvPr id="4" name="Content Placeholder 3">
+            <a:extLst>
+              <a:ext uri="{FF2B5EF4-FFF2-40B4-BE49-F238E27FC236}">
+                <a16:creationId xmlns:a16="http://schemas.microsoft.com/office/drawing/2014/main" id="{872C1E3A-6FF4-1BCF-A06D-59095EF3116D}"/>
+              </a:ext>
+            </a:extLst>
+          </p:cNvPr>
+          <p:cNvSpPr>
+            <a:spLocks noGrp="1"/>
+          </p:cNvSpPr>
+          <p:nvPr>
+            <p:ph idx="1"/>
+          </p:nvPr>
+        </p:nvSpPr>
+        <p:spPr/>
+        <p:txBody>
+          <a:bodyPr/>
+          <a:lstStyle/>
+          <a:p>
+            <a:pPr fontAlgn="ctr"/>
+            <a:r>
+              <a:rPr lang="en-US" dirty="0"/>
+              <a:t>Status Quo: Prescribe after a week of symptoms</a:t>
+            </a:r>
+          </a:p>
+          <a:p>
+            <a:pPr fontAlgn="ctr"/>
+            <a:r>
+              <a:rPr lang="en-US" dirty="0"/>
+              <a:t>Strategy 1: Prescribe after 72 hours of symptoms</a:t>
+            </a:r>
+          </a:p>
+          <a:p>
+            <a:r>
+              <a:rPr lang="en-US" dirty="0"/>
+              <a:t>Strategy 2: Prescribe after 24 hours of symptoms</a:t>
+            </a:r>
+          </a:p>
+          <a:p>
+            <a:endParaRPr lang="en-US" dirty="0"/>
+          </a:p>
+          <a:p>
+            <a:pPr marL="0" indent="0">
+              <a:buNone/>
+            </a:pPr>
+            <a:r>
+              <a:rPr lang="en-US" dirty="0"/>
+              <a:t>We want to compare these strategies because as time from symptoms goes us the risk of death increases. However, if we prescribe too often people who don’t need the medication to heal can get bad side-effects and lots of money will be spent on the high-cost drug.</a:t>
+            </a:r>
+          </a:p>
+        </p:txBody>
+      </p:sp>
+    </p:spTree>
+    <p:extLst>
+      <p:ext uri="{BB962C8B-B14F-4D97-AF65-F5344CB8AC3E}">
+        <p14:creationId xmlns:p14="http://schemas.microsoft.com/office/powerpoint/2010/main" val="604342394"/>
+      </p:ext>
+    </p:extLst>
+  </p:cSld>
+  <p:clrMapOvr>
+    <a:masterClrMapping/>
+  </p:clrMapOvr>
+</p:sld>
+</file>
+
+<file path=ppt/slides/slide7.xml><?xml version="1.0" encoding="utf-8"?>
+<p:sld xmlns:a="http://schemas.openxmlformats.org/drawingml/2006/main" xmlns:r="http://schemas.openxmlformats.org/officeDocument/2006/relationships" xmlns:p="http://schemas.openxmlformats.org/presentationml/2006/main">
+  <p:cSld>
+    <p:bg>
+      <p:bgPr>
+        <a:solidFill>
+          <a:schemeClr val="tx1"/>
+        </a:solidFill>
+        <a:effectLst/>
+      </p:bgPr>
+    </p:bg>
+    <p:spTree>
+      <p:nvGrpSpPr>
+        <p:cNvPr id="1" name="">
+          <a:extLst>
+            <a:ext uri="{FF2B5EF4-FFF2-40B4-BE49-F238E27FC236}">
+              <a16:creationId xmlns:a16="http://schemas.microsoft.com/office/drawing/2014/main" id="{A40012DB-3064-63E4-878B-4DF5EBFA58A6}"/>
+            </a:ext>
+          </a:extLst>
+        </p:cNvPr>
+        <p:cNvGrpSpPr/>
+        <p:nvPr/>
+      </p:nvGrpSpPr>
+      <p:grpSpPr>
+        <a:xfrm>
+          <a:off x="0" y="0"/>
+          <a:ext cx="0" cy="0"/>
+          <a:chOff x="0" y="0"/>
+          <a:chExt cx="0" cy="0"/>
+        </a:xfrm>
+      </p:grpSpPr>
+      <p:sp>
+        <p:nvSpPr>
+          <p:cNvPr id="2" name="Title 1">
+            <a:extLst>
+              <a:ext uri="{FF2B5EF4-FFF2-40B4-BE49-F238E27FC236}">
+                <a16:creationId xmlns:a16="http://schemas.microsoft.com/office/drawing/2014/main" id="{0D220724-CB21-8512-9CA1-72E3238713E6}"/>
+              </a:ext>
+            </a:extLst>
+          </p:cNvPr>
+          <p:cNvSpPr>
+            <a:spLocks noGrp="1"/>
+          </p:cNvSpPr>
+          <p:nvPr>
+            <p:ph type="ctrTitle"/>
+          </p:nvPr>
+        </p:nvSpPr>
+        <p:spPr>
+          <a:xfrm>
+            <a:off x="1524000" y="2235200"/>
+            <a:ext cx="9144000" cy="2387600"/>
+          </a:xfrm>
+        </p:spPr>
+        <p:txBody>
+          <a:bodyPr/>
+          <a:lstStyle/>
+          <a:p>
+            <a:r>
+              <a:rPr lang="en-US" dirty="0">
+                <a:solidFill>
+                  <a:schemeClr val="bg1"/>
+                </a:solidFill>
+              </a:rPr>
+              <a:t>BLANK SLIDES</a:t>
+            </a:r>
+          </a:p>
+        </p:txBody>
+      </p:sp>
+    </p:spTree>
+    <p:extLst>
+      <p:ext uri="{BB962C8B-B14F-4D97-AF65-F5344CB8AC3E}">
+        <p14:creationId xmlns:p14="http://schemas.microsoft.com/office/powerpoint/2010/main" val="2568067408"/>
+      </p:ext>
+    </p:extLst>
+  </p:cSld>
+  <p:clrMapOvr>
+    <a:masterClrMapping/>
+  </p:clrMapOvr>
+</p:sld>
+</file>
+
+<file path=ppt/slides/slide8.xml><?xml version="1.0" encoding="utf-8"?>
+<p:sld xmlns:a="http://schemas.openxmlformats.org/drawingml/2006/main" xmlns:r="http://schemas.openxmlformats.org/officeDocument/2006/relationships" xmlns:p="http://schemas.openxmlformats.org/presentationml/2006/main">
+  <p:cSld>
+    <p:spTree>
+      <p:nvGrpSpPr>
+        <p:cNvPr id="1" name="">
+          <a:extLst>
+            <a:ext uri="{FF2B5EF4-FFF2-40B4-BE49-F238E27FC236}">
+              <a16:creationId xmlns:a16="http://schemas.microsoft.com/office/drawing/2014/main" id="{E61E32A3-9483-7DEB-B8AD-BBC58F7160C3}"/>
+            </a:ext>
+          </a:extLst>
+        </p:cNvPr>
+        <p:cNvGrpSpPr/>
+        <p:nvPr/>
+      </p:nvGrpSpPr>
+      <p:grpSpPr>
+        <a:xfrm>
+          <a:off x="0" y="0"/>
+          <a:ext cx="0" cy="0"/>
+          <a:chOff x="0" y="0"/>
+          <a:chExt cx="0" cy="0"/>
+        </a:xfrm>
+      </p:grpSpPr>
+      <p:sp>
+        <p:nvSpPr>
+          <p:cNvPr id="2" name="Title 1">
+            <a:extLst>
+              <a:ext uri="{FF2B5EF4-FFF2-40B4-BE49-F238E27FC236}">
+                <a16:creationId xmlns:a16="http://schemas.microsoft.com/office/drawing/2014/main" id="{05013A32-7141-0879-891D-EC674813BD29}"/>
+              </a:ext>
+            </a:extLst>
+          </p:cNvPr>
+          <p:cNvSpPr>
+            <a:spLocks noGrp="1"/>
+          </p:cNvSpPr>
+          <p:nvPr>
+            <p:ph type="ctrTitle"/>
+          </p:nvPr>
+        </p:nvSpPr>
+        <p:spPr/>
+        <p:txBody>
+          <a:bodyPr/>
+          <a:lstStyle/>
+          <a:p>
+            <a:r>
+              <a:rPr lang="en-US" dirty="0"/>
+              <a:t>[Title of Project]</a:t>
+            </a:r>
+          </a:p>
+        </p:txBody>
+      </p:sp>
+      <p:sp>
+        <p:nvSpPr>
+          <p:cNvPr id="3" name="Subtitle 2">
+            <a:extLst>
+              <a:ext uri="{FF2B5EF4-FFF2-40B4-BE49-F238E27FC236}">
+                <a16:creationId xmlns:a16="http://schemas.microsoft.com/office/drawing/2014/main" id="{766A7B2F-C8D6-AED5-C920-C92AE710693C}"/>
+              </a:ext>
+            </a:extLst>
+          </p:cNvPr>
+          <p:cNvSpPr>
+            <a:spLocks noGrp="1"/>
+          </p:cNvSpPr>
+          <p:nvPr>
+            <p:ph type="subTitle" idx="1"/>
+          </p:nvPr>
+        </p:nvSpPr>
+        <p:spPr/>
+        <p:txBody>
+          <a:bodyPr/>
+          <a:lstStyle/>
+          <a:p>
+            <a:r>
+              <a:rPr lang="en-US" dirty="0"/>
+              <a:t>Report as of [date]</a:t>
+            </a:r>
+          </a:p>
+        </p:txBody>
+      </p:sp>
+    </p:spTree>
+    <p:extLst>
+      <p:ext uri="{BB962C8B-B14F-4D97-AF65-F5344CB8AC3E}">
+        <p14:creationId xmlns:p14="http://schemas.microsoft.com/office/powerpoint/2010/main" val="2451189273"/>
+      </p:ext>
+    </p:extLst>
+  </p:cSld>
+  <p:clrMapOvr>
+    <a:masterClrMapping/>
+  </p:clrMapOvr>
+</p:sld>
+</file>
+
+<file path=ppt/slides/slide9.xml><?xml version="1.0" encoding="utf-8"?>
+<p:sld xmlns:a="http://schemas.openxmlformats.org/drawingml/2006/main" xmlns:r="http://schemas.openxmlformats.org/officeDocument/2006/relationships" xmlns:p="http://schemas.openxmlformats.org/presentationml/2006/main">
+  <p:cSld>
+    <p:spTree>
+      <p:nvGrpSpPr>
+        <p:cNvPr id="1" name="">
+          <a:extLst>
+            <a:ext uri="{FF2B5EF4-FFF2-40B4-BE49-F238E27FC236}">
+              <a16:creationId xmlns:a16="http://schemas.microsoft.com/office/drawing/2014/main" id="{5079172C-05F2-CB3F-6D33-2EB168C58F6D}"/>
+            </a:ext>
+          </a:extLst>
+        </p:cNvPr>
+        <p:cNvGrpSpPr/>
+        <p:nvPr/>
+      </p:nvGrpSpPr>
+      <p:grpSpPr>
+        <a:xfrm>
+          <a:off x="0" y="0"/>
+          <a:ext cx="0" cy="0"/>
+          <a:chOff x="0" y="0"/>
+          <a:chExt cx="0" cy="0"/>
+        </a:xfrm>
+      </p:grpSpPr>
+      <p:sp>
+        <p:nvSpPr>
+          <p:cNvPr id="5" name="Title 4">
+            <a:extLst>
+              <a:ext uri="{FF2B5EF4-FFF2-40B4-BE49-F238E27FC236}">
+                <a16:creationId xmlns:a16="http://schemas.microsoft.com/office/drawing/2014/main" id="{30DA15DF-1ED7-D89D-76D9-D91D0032DE34}"/>
+              </a:ext>
+            </a:extLst>
+          </p:cNvPr>
+          <p:cNvSpPr>
+            <a:spLocks noGrp="1"/>
+          </p:cNvSpPr>
+          <p:nvPr>
+            <p:ph type="title"/>
+          </p:nvPr>
+        </p:nvSpPr>
+        <p:spPr/>
+        <p:txBody>
+          <a:bodyPr/>
+          <a:lstStyle/>
+          <a:p>
+            <a:r>
+              <a:rPr lang="en-US" dirty="0"/>
+              <a:t>About Me/Us</a:t>
+            </a:r>
+          </a:p>
+        </p:txBody>
+      </p:sp>
+      <p:sp>
+        <p:nvSpPr>
+          <p:cNvPr id="6" name="Content Placeholder 5">
+            <a:extLst>
+              <a:ext uri="{FF2B5EF4-FFF2-40B4-BE49-F238E27FC236}">
+                <a16:creationId xmlns:a16="http://schemas.microsoft.com/office/drawing/2014/main" id="{EE79165C-9045-374F-66A9-5D408DB0BADE}"/>
+              </a:ext>
+            </a:extLst>
+          </p:cNvPr>
+          <p:cNvSpPr>
+            <a:spLocks noGrp="1"/>
+          </p:cNvSpPr>
+          <p:nvPr>
+            <p:ph sz="half" idx="1"/>
+          </p:nvPr>
+        </p:nvSpPr>
+        <p:spPr>
+          <a:xfrm>
+            <a:off x="838200" y="1825625"/>
+            <a:ext cx="5181600" cy="465630"/>
+          </a:xfrm>
+        </p:spPr>
+        <p:txBody>
+          <a:bodyPr>
+            <a:normAutofit lnSpcReduction="10000"/>
+          </a:bodyPr>
+          <a:lstStyle/>
+          <a:p>
+            <a:pPr marL="0" indent="0">
+              <a:buNone/>
+            </a:pPr>
+            <a:r>
+              <a:rPr lang="en-US" dirty="0"/>
+              <a:t>Optional Photo(s) of members</a:t>
+            </a:r>
+          </a:p>
+        </p:txBody>
+      </p:sp>
+      <p:sp>
+        <p:nvSpPr>
+          <p:cNvPr id="7" name="Content Placeholder 6">
+            <a:extLst>
+              <a:ext uri="{FF2B5EF4-FFF2-40B4-BE49-F238E27FC236}">
+                <a16:creationId xmlns:a16="http://schemas.microsoft.com/office/drawing/2014/main" id="{CBD0333F-A113-DE52-AC1C-BDB460F73839}"/>
+              </a:ext>
+            </a:extLst>
+          </p:cNvPr>
+          <p:cNvSpPr>
+            <a:spLocks noGrp="1"/>
+          </p:cNvSpPr>
+          <p:nvPr>
+            <p:ph sz="half" idx="2"/>
+          </p:nvPr>
+        </p:nvSpPr>
+        <p:spPr>
+          <a:xfrm>
+            <a:off x="6172200" y="2900281"/>
+            <a:ext cx="5181600" cy="2576693"/>
+          </a:xfrm>
+        </p:spPr>
+        <p:txBody>
+          <a:bodyPr>
+            <a:normAutofit lnSpcReduction="10000"/>
+          </a:bodyPr>
+          <a:lstStyle/>
+          <a:p>
+            <a:r>
+              <a:rPr lang="en-US" dirty="0"/>
+              <a:t>Name(s)</a:t>
+            </a:r>
+          </a:p>
+          <a:p>
+            <a:r>
+              <a:rPr lang="en-US" dirty="0"/>
+              <a:t>Country</a:t>
+            </a:r>
+          </a:p>
+          <a:p>
+            <a:r>
+              <a:rPr lang="en-US" dirty="0"/>
+              <a:t>Job title(s) &amp; workplace(s)</a:t>
+            </a:r>
+          </a:p>
+          <a:p>
+            <a:r>
+              <a:rPr lang="en-US" dirty="0"/>
+              <a:t>Areas of Focus/Interest</a:t>
+            </a:r>
+          </a:p>
+          <a:p>
+            <a:endParaRPr lang="en-US" dirty="0"/>
+          </a:p>
+        </p:txBody>
+      </p:sp>
+    </p:spTree>
+    <p:extLst>
+      <p:ext uri="{BB962C8B-B14F-4D97-AF65-F5344CB8AC3E}">
+        <p14:creationId xmlns:p14="http://schemas.microsoft.com/office/powerpoint/2010/main" val="1248717342"/>
       </p:ext>
     </p:extLst>
   </p:cSld>
